--- a/lecons/F3/44_FORM4_LESSON40_Global_Warming.pptx
+++ b/lecons/F3/44_FORM4_LESSON40_Global_Warming.pptx
@@ -53,9 +53,13 @@
     <p:sldId id="301" r:id="rId47"/>
     <p:sldId id="302" r:id="rId48"/>
     <p:sldId id="303" r:id="rId49"/>
+    <p:sldId id="304" r:id="rId50"/>
+    <p:sldId id="305" r:id="rId51"/>
+    <p:sldId id="306" r:id="rId52"/>
+    <p:sldId id="307" r:id="rId53"/>
   </p:sldIdLst>
   <p:notesMasterIdLst>
-    <p:notesMasterId r:id="rId50"/>
+    <p:notesMasterId r:id="rId54"/>
   </p:notesMasterIdLst>
   <p:sldSz cx="12192000" cy="6858000"/>
   <p:notesSz cx="6858000" cy="12192000"/>
@@ -637,7 +641,7 @@
           <a:p>
             <a:r>
               <a:rPr lang="en-US" dirty="0"/>
-              <a:t>Listen carefully to this situation from real life. Baba Hamadou, 70 years old, says that when he was young, the rains in Garoua started every year in May and March was less hot. Today, the heat is stronger and the rains are irregular. Think about it, because I am going to ask you some questions.</a:t>
+              <a:t>Listen carefully to this situation from real life. Baba Hamadou, 70 years old, says that when he was young, the rains in Garoua started every year in May and March was less hot. Today the heat is stronger and the rains are irregular. His grandson asks: "Why is the Earth getting hotter, and what can we do about it?" Think about it, because I am going to ask you some questions.</a:t>
             </a:r>
             <a:endParaRPr lang="en-US" dirty="0"/>
           </a:p>
@@ -813,7 +817,7 @@
           <a:p>
             <a:r>
               <a:rPr lang="en-US" dirty="0"/>
-              <a:t>Good. The climate of Garoua is changing.</a:t>
+              <a:t>Good. The grandson does not know why the climate is getting hotter and what can be done.</a:t>
             </a:r>
             <a:endParaRPr lang="en-US" dirty="0"/>
           </a:p>
@@ -901,7 +905,7 @@
           <a:p>
             <a:r>
               <a:rPr lang="en-US" dirty="0"/>
-              <a:t>Question 2: What changes does Baba Hamadou see? Think for a moment, then raise your hand to answer.</a:t>
+              <a:t>Question 2: What has changed according to Baba Hamadou? Think for a moment, then raise your hand to answer.</a:t>
             </a:r>
             <a:endParaRPr lang="en-US" dirty="0"/>
           </a:p>
@@ -989,7 +993,7 @@
           <a:p>
             <a:r>
               <a:rPr lang="en-US" dirty="0"/>
-              <a:t>Good. More heat and irregular rains.</a:t>
+              <a:t>Good. The heat is stronger and the rains are irregular.</a:t>
             </a:r>
             <a:endParaRPr lang="en-US" dirty="0"/>
           </a:p>
@@ -1077,7 +1081,7 @@
           <a:p>
             <a:r>
               <a:rPr lang="en-US" dirty="0"/>
-              <a:t>Question 3: What is this change of the whole Earth called? Think for a moment, then raise your hand to answer.</a:t>
+              <a:t>Question 3: What is this general rise in temperature called? Think for a moment, then raise your hand to answer.</a:t>
             </a:r>
             <a:endParaRPr lang="en-US" dirty="0"/>
           </a:p>
@@ -1781,7 +1785,7 @@
           <a:p>
             <a:r>
               <a:rPr lang="en-US" dirty="0"/>
-              <a:t>Activity 2. Look carefully at this picture: smoke from a factory. Observe every detail before I ask the question.</a:t>
+              <a:t>Activity 2. Look carefully at this picture: smoke from an exhaust pipe. Observe every detail before I ask the question.</a:t>
             </a:r>
             <a:endParaRPr lang="en-US" dirty="0"/>
           </a:p>
@@ -1869,7 +1873,7 @@
           <a:p>
             <a:r>
               <a:rPr lang="en-US" dirty="0"/>
-              <a:t>Here is the question for Activity 2: Which gas comes out when we burn coal, petrol and diesel? Take one minute to think and write your answer in your rough notebook.</a:t>
+              <a:t>Here is the question for Activity 2: Which gas comes out when we burn petrol, diesel and coal? Take one minute to think and write your answer in your rough notebook.</a:t>
             </a:r>
             <a:endParaRPr lang="en-US" dirty="0"/>
           </a:p>
@@ -2045,7 +2049,7 @@
           <a:p>
             <a:r>
               <a:rPr lang="en-US" dirty="0"/>
-              <a:t>Activity 3. Look carefully at this picture: a solar power station. Observe every detail before I ask the question.</a:t>
+              <a:t>Activity 3. Look carefully at this picture: solar panels. Observe every detail before I ask the question.</a:t>
             </a:r>
             <a:endParaRPr lang="en-US" dirty="0"/>
           </a:p>
@@ -2221,7 +2225,7 @@
           <a:p>
             <a:r>
               <a:rPr lang="en-US" dirty="0"/>
-              <a:t>Let us check the answer together. They make electricity without smoke.</a:t>
+              <a:t>Let us check the answer together. They make electricity without burning fuel.</a:t>
             </a:r>
             <a:endParaRPr lang="en-US" dirty="0"/>
           </a:p>
@@ -2397,7 +2401,7 @@
           <a:p>
             <a:r>
               <a:rPr lang="en-US" dirty="0"/>
-              <a:t>Let us copy Meaning of Global Warming. Global warming is defined as follows. On this slide we have Global warming and Greenhouse gases. Write each point on a new line, with the key term first, and explain it in your own words when we revise.</a:t>
+              <a:t>Let us copy the definitions. The key terms of this lesson are defined as follows. On this slide we have Global warming. Write each point on a new line, with the key term first, and explain it in your own words when we revise. When you finish, we go to the next slide.</a:t>
             </a:r>
             <a:endParaRPr lang="en-US" dirty="0"/>
           </a:p>
@@ -2573,7 +2577,7 @@
           <a:p>
             <a:r>
               <a:rPr lang="en-US" dirty="0"/>
-              <a:t>Now draw this illustration in your notebook: the greenhouse effect. Give it a title and label it clearly.</a:t>
+              <a:t>We continue with the definitions. On this slide we have Greenhouse effect and Greenhouse gases. Write each point on a new line, with the key term first, and explain it in your own words when we revise.</a:t>
             </a:r>
             <a:endParaRPr lang="en-US" dirty="0"/>
           </a:p>
@@ -2661,7 +2665,7 @@
           <a:p>
             <a:r>
               <a:rPr lang="en-US" dirty="0"/>
-              <a:t>Let us copy Causes of Global Warming. Global warming has the following causes. On this slide we have Burning fuels and Deforestation. Write each point on a new line, with the key term first, and explain it in your own words when we revise. When you finish, we go to the next slide.</a:t>
+              <a:t>Let us copy Human Causes. Human activities cause global warming as follows. Copy the point on Burning fossil fuels on the left, then draw the diagram on the right: exhaust smoke. Give it a title and label it clearly.</a:t>
             </a:r>
             <a:endParaRPr lang="en-US" dirty="0"/>
           </a:p>
@@ -2749,7 +2753,7 @@
           <a:p>
             <a:r>
               <a:rPr lang="en-US" dirty="0"/>
-              <a:t>We continue with Causes of Global Warming. On this slide we have Natural causes. Write each point on a new line, with the key term first, and explain it in your own words when we revise.</a:t>
+              <a:t>We continue with Human Causes. On this slide we have Deforestation and bush fires and Agriculture. Write each point on a new line, with the key term first, and explain it in your own words when we revise. When you finish, we go to the next slide.</a:t>
             </a:r>
             <a:endParaRPr lang="en-US" dirty="0"/>
           </a:p>
@@ -2837,7 +2841,7 @@
           <a:p>
             <a:r>
               <a:rPr lang="en-US" dirty="0"/>
-              <a:t>Let us copy Effects of Global Warming. Global warming has the following effects. On this slide we have Extreme weather and Sea-level rise. Write each point on a new line, with the key term first, and explain it in your own words when we revise. When you finish, we go to the next slide.</a:t>
+              <a:t>We continue with Human Causes. On this slide we have Waste. Write each point on a new line, with the key term first, and explain it in your own words when we revise.</a:t>
             </a:r>
             <a:endParaRPr lang="en-US" dirty="0"/>
           </a:p>
@@ -2925,7 +2929,7 @@
           <a:p>
             <a:r>
               <a:rPr lang="en-US" dirty="0"/>
-              <a:t>We continue with Effects of Global Warming. On this slide we have Farming. Write each point on a new line, with the key term first, and explain it in your own words when we revise.</a:t>
+              <a:t>Let us copy Natural Causes. Natural factors also change the temperature of the Earth. On this slide we have Changes in the Sun and Volcanic eruptions. Write each point on a new line, with the key term first, and explain it in your own words when we revise.</a:t>
             </a:r>
             <a:endParaRPr lang="en-US" dirty="0"/>
           </a:p>
@@ -3013,7 +3017,7 @@
           <a:p>
             <a:r>
               <a:rPr lang="en-US" dirty="0"/>
-              <a:t>Let us copy Adaptation and Mitigation. People respond to global warming with the following measures. On this slide we have Mitigation. Write each point on a new line, with the key term first, and explain it in your own words when we revise. When you finish, we go to the next slide.</a:t>
+              <a:t>Copy the point on Natural greenhouse effect on the left, then draw the diagram on the right: the greenhouse effect. Give it a title and label it clearly.</a:t>
             </a:r>
             <a:endParaRPr lang="en-US" dirty="0"/>
           </a:p>
@@ -3101,7 +3105,7 @@
           <a:p>
             <a:r>
               <a:rPr lang="en-US" dirty="0"/>
-              <a:t>We continue with Adaptation and Mitigation. On this slide we have Adaptation. Write each point on a new line, with the key term first, and explain it in your own words when we revise.</a:t>
+              <a:t>Let us copy Effects of Global Warming. Global warming has the following effects. On this slide we have Extreme weather and Sea-level rise. Write each point on a new line, with the key term first, and explain it in your own words when we revise. When you finish, we go to the next slide.</a:t>
             </a:r>
             <a:endParaRPr lang="en-US" dirty="0"/>
           </a:p>
@@ -3189,7 +3193,7 @@
           <a:p>
             <a:r>
               <a:rPr lang="en-US" dirty="0"/>
-              <a:t>Now let us check what you have understood. Question 1: Give one human cause of global warming. Answer in your exercise book.</a:t>
+              <a:t>We continue with Effects of Global Warming. On this slide we have Farming and food, Water and health and Loss of plants and animals. Write each point on a new line, with the key term first, and explain it in your own words when we revise.</a:t>
             </a:r>
             <a:endParaRPr lang="en-US" dirty="0"/>
           </a:p>
@@ -3277,7 +3281,7 @@
           <a:p>
             <a:r>
               <a:rPr lang="en-US" dirty="0"/>
-              <a:t>The expected answer is: burning petrol and diesel (or deforestation). If you got it right, well done.</a:t>
+              <a:t>Let us copy Adaptation and Mitigation. People respond to global warming with the following measures. Copy the point on Clean energy (mitigation) on the left, then draw the diagram on the right: solar panels. Give it a title and label it clearly.</a:t>
             </a:r>
             <a:endParaRPr lang="en-US" dirty="0"/>
           </a:p>
@@ -3365,7 +3369,7 @@
           <a:p>
             <a:r>
               <a:rPr lang="en-US" dirty="0"/>
-              <a:t>Now let us check what you have understood. Question 2: What is the difference between mitigation and adaptation? Answer in your exercise book.</a:t>
+              <a:t>We continue with Adaptation and Mitigation. On this slide we have Tree planting (mitigation) and Saving energy (mitigation). Write each point on a new line, with the key term first, and explain it in your own words when we revise. When you finish, we go to the next slide.</a:t>
             </a:r>
             <a:endParaRPr lang="en-US" dirty="0"/>
           </a:p>
@@ -3541,7 +3545,7 @@
           <a:p>
             <a:r>
               <a:rPr lang="en-US" dirty="0"/>
-              <a:t>The expected answer is: mitigation reduces the causes; adaptation lives with the changes. If you got it right, well done.</a:t>
+              <a:t>We continue with Adaptation and Mitigation. On this slide we have New farming methods (adaptation) and Protection (adaptation). Write each point on a new line, with the key term first, and explain it in your own words when we revise.</a:t>
             </a:r>
             <a:endParaRPr lang="en-US" dirty="0"/>
           </a:p>
@@ -3629,7 +3633,7 @@
           <a:p>
             <a:r>
               <a:rPr lang="en-US" dirty="0"/>
-              <a:t>For those who need more practice, fill in the blanks in your exercise book. The answers are: number 1, warming; number 2, carbon dioxide (CO₂); number 3, mitigation.</a:t>
+              <a:t>Now let us check what you have understood. Question 1: Give one human cause of global warming. Answer in your exercise book.</a:t>
             </a:r>
             <a:endParaRPr lang="en-US" dirty="0"/>
           </a:p>
@@ -3717,7 +3721,7 @@
           <a:p>
             <a:r>
               <a:rPr lang="en-US" dirty="0"/>
-              <a:t>For your homework: Ask an adult in your family whether your area has ever been flooded or has suffered a very dry year. Write down when it happened and what damage it caused. We shall correct it at the beginning of our next lesson.</a:t>
+              <a:t>The expected answer is: burning petrol and diesel (or deforestation). If you got it right, well done.</a:t>
             </a:r>
             <a:endParaRPr lang="en-US" dirty="0"/>
           </a:p>
@@ -3805,7 +3809,7 @@
           <a:p>
             <a:r>
               <a:rPr lang="en-US" dirty="0"/>
-              <a:t>Our next lesson will be on Lesson 41: Floods, Droughts and Desertification. Thank you for your attention, and see you next time.</a:t>
+              <a:t>Now let us check what you have understood. Question 2: What is the difference between mitigation and adaptation? Answer in your exercise book.</a:t>
             </a:r>
             <a:endParaRPr lang="en-US" dirty="0"/>
           </a:p>
@@ -3893,7 +3897,7 @@
           <a:p>
             <a:r>
               <a:rPr lang="en-US" dirty="0"/>
-              <a:t>Let us play the bilingual game. I say a word in English, and you give me the French word. Then we do the reverse.</a:t>
+              <a:t>The expected answer is: mitigation reduces the causes; adaptation lives with the changes. If you got it right, well done.</a:t>
             </a:r>
             <a:endParaRPr lang="en-US" dirty="0"/>
           </a:p>
@@ -3981,7 +3985,7 @@
           <a:p>
             <a:r>
               <a:rPr lang="en-US" dirty="0"/>
-              <a:t>I record this information in the official logbook of the class after the lesson.</a:t>
+              <a:t>For those who need more practice, fill in the blanks in your exercise book. The answers are: number 1, warming; number 2, carbon dioxide (CO₂); number 3, mitigation.</a:t>
             </a:r>
             <a:endParaRPr lang="en-US" dirty="0"/>
           </a:p>
@@ -4069,7 +4073,7 @@
           <a:p>
             <a:r>
               <a:rPr lang="en-US" dirty="0"/>
-              <a:t>I complete the second page of the logbook: the matter taught, the evaluation, the homework and the attendance.</a:t>
+              <a:t>For your homework: Ask an adult in your family whether your area has ever been flooded or has suffered a very dry year. Write down when it happened and what damage it caused. We shall correct it at the beginning of our next lesson.</a:t>
             </a:r>
             <a:endParaRPr lang="en-US" dirty="0"/>
           </a:p>
@@ -4157,7 +4161,7 @@
           <a:p>
             <a:r>
               <a:rPr lang="en-US" dirty="0"/>
-              <a:t>This slide is for me, the teacher: it gives the timing of the lesson and what to do if the projector is not available.</a:t>
+              <a:t>Our next lesson will be on Lesson 41: Floods, Droughts and Desertification. Thank you for your attention, and see you next time.</a:t>
             </a:r>
             <a:endParaRPr lang="en-US" dirty="0"/>
           </a:p>
@@ -4245,7 +4249,7 @@
           <a:p>
             <a:r>
               <a:rPr lang="en-US" dirty="0"/>
-              <a:t>These are the references and picture credits used to prepare this lesson.</a:t>
+              <a:t>Let us play the bilingual game. I say a word in English, and you give me the French word. Then we do the reverse.</a:t>
             </a:r>
             <a:endParaRPr lang="en-US" dirty="0"/>
           </a:p>
@@ -4269,6 +4273,94 @@
             <a:fld id="{F7021451-1387-4CA6-816F-3879F97B5CBC}" type="slidenum">
               <a:rPr lang="en-US"/>
               <a:t>48</a:t>
+            </a:fld>
+            <a:endParaRPr lang="en-US"/>
+          </a:p>
+        </p:txBody>
+      </p:sp>
+    </p:spTree>
+    <p:extLst>
+      <p:ext uri="{BB962C8B-B14F-4D97-AF65-F5344CB8AC3E}">
+        <p14:creationId xmlns:p14="http://schemas.microsoft.com/office/powerpoint/2010/main" val="1024086991"/>
+      </p:ext>
+    </p:extLst>
+  </p:cSld>
+  <p:clrMapOvr>
+    <a:masterClrMapping/>
+  </p:clrMapOvr>
+</p:notes>
+</file>
+
+<file path=ppt/notesSlides/notesSlide49.xml><?xml version="1.0" encoding="utf-8"?>
+<p:notes xmlns:a="http://schemas.openxmlformats.org/drawingml/2006/main" xmlns:r="http://schemas.openxmlformats.org/officeDocument/2006/relationships" xmlns:p="http://schemas.openxmlformats.org/presentationml/2006/main">
+  <p:cSld>
+    <p:spTree>
+      <p:nvGrpSpPr>
+        <p:cNvPr id="1" name=""/>
+        <p:cNvGrpSpPr/>
+        <p:nvPr/>
+      </p:nvGrpSpPr>
+      <p:grpSpPr>
+        <a:xfrm>
+          <a:off x="0" y="0"/>
+          <a:ext cx="0" cy="0"/>
+          <a:chOff x="0" y="0"/>
+          <a:chExt cx="0" cy="0"/>
+        </a:xfrm>
+      </p:grpSpPr>
+      <p:sp>
+        <p:nvSpPr>
+          <p:cNvPr id="2" name="Slide Image Placeholder 1"/>
+          <p:cNvSpPr>
+            <a:spLocks noGrp="1" noRot="1" noChangeAspect="1"/>
+          </p:cNvSpPr>
+          <p:nvPr>
+            <p:ph type="sldImg"/>
+          </p:nvPr>
+        </p:nvSpPr>
+        <p:spPr/>
+      </p:sp>
+      <p:sp>
+        <p:nvSpPr>
+          <p:cNvPr id="3" name="Notes Placeholder 2"/>
+          <p:cNvSpPr>
+            <a:spLocks noGrp="1"/>
+          </p:cNvSpPr>
+          <p:nvPr>
+            <p:ph type="body" idx="1"/>
+          </p:nvPr>
+        </p:nvSpPr>
+        <p:spPr/>
+        <p:txBody>
+          <a:bodyPr/>
+          <a:lstStyle/>
+          <a:p>
+            <a:r>
+              <a:rPr lang="en-US" dirty="0"/>
+              <a:t>I record this information in the official logbook of the class after the lesson.</a:t>
+            </a:r>
+            <a:endParaRPr lang="en-US" dirty="0"/>
+          </a:p>
+        </p:txBody>
+      </p:sp>
+      <p:sp>
+        <p:nvSpPr>
+          <p:cNvPr id="4" name="Slide Number Placeholder 3"/>
+          <p:cNvSpPr>
+            <a:spLocks noGrp="1"/>
+          </p:cNvSpPr>
+          <p:nvPr>
+            <p:ph type="sldNum" sz="quarter" idx="10"/>
+          </p:nvPr>
+        </p:nvSpPr>
+        <p:spPr/>
+        <p:txBody>
+          <a:bodyPr/>
+          <a:lstStyle/>
+          <a:p>
+            <a:fld id="{F7021451-1387-4CA6-816F-3879F97B5CBC}" type="slidenum">
+              <a:rPr lang="en-US"/>
+              <a:t>49</a:t>
             </a:fld>
             <a:endParaRPr lang="en-US"/>
           </a:p>
@@ -4375,6 +4467,270 @@
 </p:notes>
 </file>
 
+<file path=ppt/notesSlides/notesSlide50.xml><?xml version="1.0" encoding="utf-8"?>
+<p:notes xmlns:a="http://schemas.openxmlformats.org/drawingml/2006/main" xmlns:r="http://schemas.openxmlformats.org/officeDocument/2006/relationships" xmlns:p="http://schemas.openxmlformats.org/presentationml/2006/main">
+  <p:cSld>
+    <p:spTree>
+      <p:nvGrpSpPr>
+        <p:cNvPr id="1" name=""/>
+        <p:cNvGrpSpPr/>
+        <p:nvPr/>
+      </p:nvGrpSpPr>
+      <p:grpSpPr>
+        <a:xfrm>
+          <a:off x="0" y="0"/>
+          <a:ext cx="0" cy="0"/>
+          <a:chOff x="0" y="0"/>
+          <a:chExt cx="0" cy="0"/>
+        </a:xfrm>
+      </p:grpSpPr>
+      <p:sp>
+        <p:nvSpPr>
+          <p:cNvPr id="2" name="Slide Image Placeholder 1"/>
+          <p:cNvSpPr>
+            <a:spLocks noGrp="1" noRot="1" noChangeAspect="1"/>
+          </p:cNvSpPr>
+          <p:nvPr>
+            <p:ph type="sldImg"/>
+          </p:nvPr>
+        </p:nvSpPr>
+        <p:spPr/>
+      </p:sp>
+      <p:sp>
+        <p:nvSpPr>
+          <p:cNvPr id="3" name="Notes Placeholder 2"/>
+          <p:cNvSpPr>
+            <a:spLocks noGrp="1"/>
+          </p:cNvSpPr>
+          <p:nvPr>
+            <p:ph type="body" idx="1"/>
+          </p:nvPr>
+        </p:nvSpPr>
+        <p:spPr/>
+        <p:txBody>
+          <a:bodyPr/>
+          <a:lstStyle/>
+          <a:p>
+            <a:r>
+              <a:rPr lang="en-US" dirty="0"/>
+              <a:t>I complete the second page of the logbook: the matter taught, the evaluation, the homework and the attendance.</a:t>
+            </a:r>
+            <a:endParaRPr lang="en-US" dirty="0"/>
+          </a:p>
+        </p:txBody>
+      </p:sp>
+      <p:sp>
+        <p:nvSpPr>
+          <p:cNvPr id="4" name="Slide Number Placeholder 3"/>
+          <p:cNvSpPr>
+            <a:spLocks noGrp="1"/>
+          </p:cNvSpPr>
+          <p:nvPr>
+            <p:ph type="sldNum" sz="quarter" idx="10"/>
+          </p:nvPr>
+        </p:nvSpPr>
+        <p:spPr/>
+        <p:txBody>
+          <a:bodyPr/>
+          <a:lstStyle/>
+          <a:p>
+            <a:fld id="{F7021451-1387-4CA6-816F-3879F97B5CBC}" type="slidenum">
+              <a:rPr lang="en-US"/>
+              <a:t>50</a:t>
+            </a:fld>
+            <a:endParaRPr lang="en-US"/>
+          </a:p>
+        </p:txBody>
+      </p:sp>
+    </p:spTree>
+    <p:extLst>
+      <p:ext uri="{BB962C8B-B14F-4D97-AF65-F5344CB8AC3E}">
+        <p14:creationId xmlns:p14="http://schemas.microsoft.com/office/powerpoint/2010/main" val="1024086991"/>
+      </p:ext>
+    </p:extLst>
+  </p:cSld>
+  <p:clrMapOvr>
+    <a:masterClrMapping/>
+  </p:clrMapOvr>
+</p:notes>
+</file>
+
+<file path=ppt/notesSlides/notesSlide51.xml><?xml version="1.0" encoding="utf-8"?>
+<p:notes xmlns:a="http://schemas.openxmlformats.org/drawingml/2006/main" xmlns:r="http://schemas.openxmlformats.org/officeDocument/2006/relationships" xmlns:p="http://schemas.openxmlformats.org/presentationml/2006/main">
+  <p:cSld>
+    <p:spTree>
+      <p:nvGrpSpPr>
+        <p:cNvPr id="1" name=""/>
+        <p:cNvGrpSpPr/>
+        <p:nvPr/>
+      </p:nvGrpSpPr>
+      <p:grpSpPr>
+        <a:xfrm>
+          <a:off x="0" y="0"/>
+          <a:ext cx="0" cy="0"/>
+          <a:chOff x="0" y="0"/>
+          <a:chExt cx="0" cy="0"/>
+        </a:xfrm>
+      </p:grpSpPr>
+      <p:sp>
+        <p:nvSpPr>
+          <p:cNvPr id="2" name="Slide Image Placeholder 1"/>
+          <p:cNvSpPr>
+            <a:spLocks noGrp="1" noRot="1" noChangeAspect="1"/>
+          </p:cNvSpPr>
+          <p:nvPr>
+            <p:ph type="sldImg"/>
+          </p:nvPr>
+        </p:nvSpPr>
+        <p:spPr/>
+      </p:sp>
+      <p:sp>
+        <p:nvSpPr>
+          <p:cNvPr id="3" name="Notes Placeholder 2"/>
+          <p:cNvSpPr>
+            <a:spLocks noGrp="1"/>
+          </p:cNvSpPr>
+          <p:nvPr>
+            <p:ph type="body" idx="1"/>
+          </p:nvPr>
+        </p:nvSpPr>
+        <p:spPr/>
+        <p:txBody>
+          <a:bodyPr/>
+          <a:lstStyle/>
+          <a:p>
+            <a:r>
+              <a:rPr lang="en-US" dirty="0"/>
+              <a:t>This slide is for me, the teacher: it gives the timing of the lesson and what to do if the projector is not available.</a:t>
+            </a:r>
+            <a:endParaRPr lang="en-US" dirty="0"/>
+          </a:p>
+        </p:txBody>
+      </p:sp>
+      <p:sp>
+        <p:nvSpPr>
+          <p:cNvPr id="4" name="Slide Number Placeholder 3"/>
+          <p:cNvSpPr>
+            <a:spLocks noGrp="1"/>
+          </p:cNvSpPr>
+          <p:nvPr>
+            <p:ph type="sldNum" sz="quarter" idx="10"/>
+          </p:nvPr>
+        </p:nvSpPr>
+        <p:spPr/>
+        <p:txBody>
+          <a:bodyPr/>
+          <a:lstStyle/>
+          <a:p>
+            <a:fld id="{F7021451-1387-4CA6-816F-3879F97B5CBC}" type="slidenum">
+              <a:rPr lang="en-US"/>
+              <a:t>51</a:t>
+            </a:fld>
+            <a:endParaRPr lang="en-US"/>
+          </a:p>
+        </p:txBody>
+      </p:sp>
+    </p:spTree>
+    <p:extLst>
+      <p:ext uri="{BB962C8B-B14F-4D97-AF65-F5344CB8AC3E}">
+        <p14:creationId xmlns:p14="http://schemas.microsoft.com/office/powerpoint/2010/main" val="1024086991"/>
+      </p:ext>
+    </p:extLst>
+  </p:cSld>
+  <p:clrMapOvr>
+    <a:masterClrMapping/>
+  </p:clrMapOvr>
+</p:notes>
+</file>
+
+<file path=ppt/notesSlides/notesSlide52.xml><?xml version="1.0" encoding="utf-8"?>
+<p:notes xmlns:a="http://schemas.openxmlformats.org/drawingml/2006/main" xmlns:r="http://schemas.openxmlformats.org/officeDocument/2006/relationships" xmlns:p="http://schemas.openxmlformats.org/presentationml/2006/main">
+  <p:cSld>
+    <p:spTree>
+      <p:nvGrpSpPr>
+        <p:cNvPr id="1" name=""/>
+        <p:cNvGrpSpPr/>
+        <p:nvPr/>
+      </p:nvGrpSpPr>
+      <p:grpSpPr>
+        <a:xfrm>
+          <a:off x="0" y="0"/>
+          <a:ext cx="0" cy="0"/>
+          <a:chOff x="0" y="0"/>
+          <a:chExt cx="0" cy="0"/>
+        </a:xfrm>
+      </p:grpSpPr>
+      <p:sp>
+        <p:nvSpPr>
+          <p:cNvPr id="2" name="Slide Image Placeholder 1"/>
+          <p:cNvSpPr>
+            <a:spLocks noGrp="1" noRot="1" noChangeAspect="1"/>
+          </p:cNvSpPr>
+          <p:nvPr>
+            <p:ph type="sldImg"/>
+          </p:nvPr>
+        </p:nvSpPr>
+        <p:spPr/>
+      </p:sp>
+      <p:sp>
+        <p:nvSpPr>
+          <p:cNvPr id="3" name="Notes Placeholder 2"/>
+          <p:cNvSpPr>
+            <a:spLocks noGrp="1"/>
+          </p:cNvSpPr>
+          <p:nvPr>
+            <p:ph type="body" idx="1"/>
+          </p:nvPr>
+        </p:nvSpPr>
+        <p:spPr/>
+        <p:txBody>
+          <a:bodyPr/>
+          <a:lstStyle/>
+          <a:p>
+            <a:r>
+              <a:rPr lang="en-US" dirty="0"/>
+              <a:t>These are the references and picture credits used to prepare this lesson.</a:t>
+            </a:r>
+            <a:endParaRPr lang="en-US" dirty="0"/>
+          </a:p>
+        </p:txBody>
+      </p:sp>
+      <p:sp>
+        <p:nvSpPr>
+          <p:cNvPr id="4" name="Slide Number Placeholder 3"/>
+          <p:cNvSpPr>
+            <a:spLocks noGrp="1"/>
+          </p:cNvSpPr>
+          <p:nvPr>
+            <p:ph type="sldNum" sz="quarter" idx="10"/>
+          </p:nvPr>
+        </p:nvSpPr>
+        <p:spPr/>
+        <p:txBody>
+          <a:bodyPr/>
+          <a:lstStyle/>
+          <a:p>
+            <a:fld id="{F7021451-1387-4CA6-816F-3879F97B5CBC}" type="slidenum">
+              <a:rPr lang="en-US"/>
+              <a:t>52</a:t>
+            </a:fld>
+            <a:endParaRPr lang="en-US"/>
+          </a:p>
+        </p:txBody>
+      </p:sp>
+    </p:spTree>
+    <p:extLst>
+      <p:ext uri="{BB962C8B-B14F-4D97-AF65-F5344CB8AC3E}">
+        <p14:creationId xmlns:p14="http://schemas.microsoft.com/office/powerpoint/2010/main" val="1024086991"/>
+      </p:ext>
+    </p:extLst>
+  </p:cSld>
+  <p:clrMapOvr>
+    <a:masterClrMapping/>
+  </p:clrMapOvr>
+</p:notes>
+</file>
+
 <file path=ppt/notesSlides/notesSlide6.xml><?xml version="1.0" encoding="utf-8"?>
 <p:notes xmlns:a="http://schemas.openxmlformats.org/drawingml/2006/main" xmlns:r="http://schemas.openxmlformats.org/officeDocument/2006/relationships" xmlns:p="http://schemas.openxmlformats.org/presentationml/2006/main">
   <p:cSld>
@@ -4597,7 +4953,7 @@
           <a:p>
             <a:r>
               <a:rPr lang="en-US" dirty="0"/>
-              <a:t>By the end of this lesson, you should be able to do three things. Number 1: define global warming, the greenhouse effect and greenhouse gases. Number 2: explain the natural and human causes of global warming. Number 3: describe its effects. Number 4: propose adaptation and mitigation measures.</a:t>
+              <a:t>By the end of this lesson, you should be able to do four things. Number 1: define global warming, the greenhouse effect and greenhouse gases. Number 2: explain the natural and human causes of global warming. Number 3: describe its effects. Number 4: propose adaptation and mitigation measures.</a:t>
             </a:r>
             <a:endParaRPr lang="en-US" dirty="0"/>
           </a:p>
@@ -6065,7 +6421,7 @@
         <p:spPr>
           <a:xfrm>
             <a:off x="0" y="658368"/>
-            <a:ext cx="5120640" cy="5833872"/>
+            <a:ext cx="2468880" cy="5833872"/>
           </a:xfrm>
           <a:prstGeom prst="rect">
             <a:avLst/>
@@ -6080,8 +6436,8 @@
         </p:nvSpPr>
         <p:spPr>
           <a:xfrm>
-            <a:off x="5349240" y="1005840"/>
-            <a:ext cx="6522415" cy="731520"/>
+            <a:off x="2697480" y="1005840"/>
+            <a:ext cx="9174175" cy="731520"/>
           </a:xfrm>
           <a:prstGeom prst="rect">
             <a:avLst/>
@@ -6121,8 +6477,8 @@
         </p:nvSpPr>
         <p:spPr>
           <a:xfrm>
-            <a:off x="5349240" y="1783080"/>
-            <a:ext cx="6522415" cy="4663440"/>
+            <a:off x="2697480" y="1783080"/>
+            <a:ext cx="9174175" cy="4663440"/>
           </a:xfrm>
           <a:prstGeom prst="rect">
             <a:avLst/>
@@ -6149,7 +6505,7 @@
                 <a:ea typeface="Times New Roman" pitchFamily="34" charset="-122"/>
                 <a:cs typeface="Times New Roman" pitchFamily="34" charset="-120"/>
               </a:rPr>
-              <a:t>Baba Hamadou, 70 years old, says that when he was young, the rains in Garoua started every year in May and March was less hot. Today, the heat is stronger and the rains are irregular.</a:t>
+              <a:t>Baba Hamadou, 70 years old, says that when he was young, the rains in Garoua started every year in May and March was less hot. Today the heat is stronger and the rains are irregular. His grandson asks: "Why is the Earth getting hotter, and what can we do about it?"</a:t>
             </a:r>
             <a:endParaRPr lang="en-US" sz="4000" dirty="0"/>
           </a:p>
@@ -6587,7 +6943,7 @@
                 <a:ea typeface="Times New Roman" pitchFamily="34" charset="-122"/>
                 <a:cs typeface="Times New Roman" pitchFamily="34" charset="-120"/>
               </a:rPr>
-              <a:t>The climate of Garoua is changing.</a:t>
+              <a:t>The grandson does not know why the climate is getting hotter and what can be done.</a:t>
             </a:r>
             <a:endParaRPr lang="en-US" sz="4000" dirty="0"/>
           </a:p>
@@ -6806,7 +7162,7 @@
                 <a:ea typeface="Times New Roman" pitchFamily="34" charset="-122"/>
                 <a:cs typeface="Times New Roman" pitchFamily="34" charset="-120"/>
               </a:rPr>
-              <a:t>What changes does Baba Hamadou see?</a:t>
+              <a:t>What has changed according to Baba Hamadou?</a:t>
             </a:r>
             <a:endParaRPr lang="en-US" sz="4000" dirty="0"/>
           </a:p>
@@ -7025,7 +7381,7 @@
                 <a:ea typeface="Times New Roman" pitchFamily="34" charset="-122"/>
                 <a:cs typeface="Times New Roman" pitchFamily="34" charset="-120"/>
               </a:rPr>
-              <a:t>More heat and irregular rains.</a:t>
+              <a:t>The heat is stronger and the rains are irregular.</a:t>
             </a:r>
             <a:endParaRPr lang="en-US" sz="4000" dirty="0"/>
           </a:p>
@@ -7244,7 +7600,7 @@
                 <a:ea typeface="Times New Roman" pitchFamily="34" charset="-122"/>
                 <a:cs typeface="Times New Roman" pitchFamily="34" charset="-120"/>
               </a:rPr>
-              <a:t>What is this change of the whole Earth called?</a:t>
+              <a:t>What is this general rise in temperature called?</a:t>
             </a:r>
             <a:endParaRPr lang="en-US" sz="4000" dirty="0"/>
           </a:p>
@@ -8013,7 +8369,7 @@
                 <a:ea typeface="Calibri" pitchFamily="34" charset="-122"/>
                 <a:cs typeface="Calibri" pitchFamily="34" charset="-120"/>
               </a:rPr>
-              <a:t>1. MEANING OF GLOBAL WARMING</a:t>
+              <a:t>DEFINITIONS</a:t>
             </a:r>
             <a:endParaRPr lang="en-US" sz="1400" dirty="0"/>
           </a:p>
@@ -8822,7 +9178,7 @@
                 <a:ea typeface="Calibri" pitchFamily="34" charset="-122"/>
                 <a:cs typeface="Calibri" pitchFamily="34" charset="-120"/>
               </a:rPr>
-              <a:t>1. MEANING OF GLOBAL WARMING</a:t>
+              <a:t>DEFINITIONS</a:t>
             </a:r>
             <a:endParaRPr lang="en-US" sz="1400" dirty="0"/>
           </a:p>
@@ -9041,7 +9397,7 @@
                 <a:ea typeface="Calibri" pitchFamily="34" charset="-122"/>
                 <a:cs typeface="Calibri" pitchFamily="34" charset="-120"/>
               </a:rPr>
-              <a:t>1. MEANING OF GLOBAL WARMING</a:t>
+              <a:t>DEFINITIONS</a:t>
             </a:r>
             <a:endParaRPr lang="en-US" sz="1400" dirty="0"/>
           </a:p>
@@ -9260,7 +9616,7 @@
                 <a:ea typeface="Calibri" pitchFamily="34" charset="-122"/>
                 <a:cs typeface="Calibri" pitchFamily="34" charset="-120"/>
               </a:rPr>
-              <a:t>2. CAUSES</a:t>
+              <a:t>1. CAUSES</a:t>
             </a:r>
             <a:endParaRPr lang="en-US" sz="1400" dirty="0"/>
           </a:p>
@@ -9362,7 +9718,7 @@
                 <a:ea typeface="Times New Roman" pitchFamily="34" charset="-122"/>
                 <a:cs typeface="Times New Roman" pitchFamily="34" charset="-120"/>
               </a:rPr>
-              <a:t>Smoke from a factory.</a:t>
+              <a:t>Smoke from an exhaust pipe.</a:t>
             </a:r>
             <a:endParaRPr lang="en-US" sz="1800" dirty="0"/>
           </a:p>
@@ -9474,7 +9830,7 @@
                 <a:ea typeface="Calibri" pitchFamily="34" charset="-122"/>
                 <a:cs typeface="Calibri" pitchFamily="34" charset="-120"/>
               </a:rPr>
-              <a:t>2. CAUSES</a:t>
+              <a:t>1. CAUSES</a:t>
             </a:r>
             <a:endParaRPr lang="en-US" sz="1400" dirty="0"/>
           </a:p>
@@ -9581,7 +9937,7 @@
                 <a:ea typeface="Times New Roman" pitchFamily="34" charset="-122"/>
                 <a:cs typeface="Times New Roman" pitchFamily="34" charset="-120"/>
               </a:rPr>
-              <a:t>Which gas comes out when we burn coal, petrol and diesel?</a:t>
+              <a:t>Which gas comes out when we burn petrol, diesel and coal?</a:t>
             </a:r>
             <a:endParaRPr lang="en-US" sz="4000" dirty="0"/>
           </a:p>
@@ -9693,7 +10049,7 @@
                 <a:ea typeface="Calibri" pitchFamily="34" charset="-122"/>
                 <a:cs typeface="Calibri" pitchFamily="34" charset="-120"/>
               </a:rPr>
-              <a:t>2. CAUSES</a:t>
+              <a:t>1. CAUSES</a:t>
             </a:r>
             <a:endParaRPr lang="en-US" sz="1400" dirty="0"/>
           </a:p>
@@ -9912,7 +10268,7 @@
                 <a:ea typeface="Calibri" pitchFamily="34" charset="-122"/>
                 <a:cs typeface="Calibri" pitchFamily="34" charset="-120"/>
               </a:rPr>
-              <a:t>4. ADAPTATION AND MITIGATION</a:t>
+              <a:t>3. ADAPTATION AND MITIGATION</a:t>
             </a:r>
             <a:endParaRPr lang="en-US" sz="1400" dirty="0"/>
           </a:p>
@@ -10014,7 +10370,7 @@
                 <a:ea typeface="Times New Roman" pitchFamily="34" charset="-122"/>
                 <a:cs typeface="Times New Roman" pitchFamily="34" charset="-120"/>
               </a:rPr>
-              <a:t>A solar power station.</a:t>
+              <a:t>Solar panels.</a:t>
             </a:r>
             <a:endParaRPr lang="en-US" sz="1800" dirty="0"/>
           </a:p>
@@ -10126,7 +10482,7 @@
                 <a:ea typeface="Calibri" pitchFamily="34" charset="-122"/>
                 <a:cs typeface="Calibri" pitchFamily="34" charset="-120"/>
               </a:rPr>
-              <a:t>4. ADAPTATION AND MITIGATION</a:t>
+              <a:t>3. ADAPTATION AND MITIGATION</a:t>
             </a:r>
             <a:endParaRPr lang="en-US" sz="1400" dirty="0"/>
           </a:p>
@@ -10345,7 +10701,7 @@
                 <a:ea typeface="Calibri" pitchFamily="34" charset="-122"/>
                 <a:cs typeface="Calibri" pitchFamily="34" charset="-120"/>
               </a:rPr>
-              <a:t>4. ADAPTATION AND MITIGATION</a:t>
+              <a:t>3. ADAPTATION AND MITIGATION</a:t>
             </a:r>
             <a:endParaRPr lang="en-US" sz="1400" dirty="0"/>
           </a:p>
@@ -10452,7 +10808,7 @@
                 <a:ea typeface="Times New Roman" pitchFamily="34" charset="-122"/>
                 <a:cs typeface="Times New Roman" pitchFamily="34" charset="-120"/>
               </a:rPr>
-              <a:t>They make electricity without smoke.</a:t>
+              <a:t>They make electricity without burning fuel.</a:t>
             </a:r>
             <a:endParaRPr lang="en-US" sz="4000" dirty="0"/>
           </a:p>
@@ -10846,7 +11202,7 @@
         <p:spPr>
           <a:xfrm>
             <a:off x="0" y="658368"/>
-            <a:ext cx="2468880" cy="5833872"/>
+            <a:ext cx="5120640" cy="5833872"/>
           </a:xfrm>
           <a:prstGeom prst="rect">
             <a:avLst/>
@@ -10861,8 +11217,8 @@
         </p:nvSpPr>
         <p:spPr>
           <a:xfrm>
-            <a:off x="2697480" y="1005840"/>
-            <a:ext cx="9174175" cy="731520"/>
+            <a:off x="5349240" y="1005840"/>
+            <a:ext cx="6522415" cy="731520"/>
           </a:xfrm>
           <a:prstGeom prst="rect">
             <a:avLst/>
@@ -10888,7 +11244,7 @@
                 <a:ea typeface="Times New Roman" pitchFamily="34" charset="-122"/>
                 <a:cs typeface="Times New Roman" pitchFamily="34" charset="-120"/>
               </a:rPr>
-              <a:t>1. Meaning of Global Warming</a:t>
+              <a:t>DEFINITIONS</a:t>
             </a:r>
             <a:endParaRPr lang="en-US" sz="3600" dirty="0"/>
           </a:p>
@@ -10902,8 +11258,8 @@
         </p:nvSpPr>
         <p:spPr>
           <a:xfrm>
-            <a:off x="2697480" y="1783080"/>
-            <a:ext cx="9174175" cy="4663440"/>
+            <a:off x="5349240" y="1783080"/>
+            <a:ext cx="6522415" cy="4663440"/>
           </a:xfrm>
           <a:prstGeom prst="rect">
             <a:avLst/>
@@ -10930,7 +11286,7 @@
                 <a:ea typeface="Times New Roman" pitchFamily="34" charset="-122"/>
                 <a:cs typeface="Times New Roman" pitchFamily="34" charset="-120"/>
               </a:rPr>
-              <a:t>Global warming is defined as follows:</a:t>
+              <a:t>The key terms of this lesson are defined as follows:</a:t>
             </a:r>
             <a:endParaRPr lang="en-US" sz="4000" dirty="0"/>
           </a:p>
@@ -10967,44 +11323,7 @@
                 <a:ea typeface="Times New Roman" pitchFamily="34" charset="-122"/>
                 <a:cs typeface="Times New Roman" pitchFamily="34" charset="-120"/>
               </a:rPr>
-              <a:t>It is the rise of the average temperature of the Earth.</a:t>
-            </a:r>
-            <a:endParaRPr lang="en-US" sz="4000" dirty="0"/>
-          </a:p>
-          <a:p>
-            <a:pPr algn="l" indent="0" marL="0">
-              <a:spcAft>
-                <a:spcPts val="800"/>
-              </a:spcAft>
-              <a:buNone/>
-            </a:pPr>
-            <a:r>
-              <a:rPr lang="en-US" sz="4000" b="1" dirty="0">
-                <a:solidFill>
-                  <a:srgbClr val="111111"/>
-                </a:solidFill>
-                <a:latin typeface="Times New Roman" pitchFamily="34" charset="0"/>
-                <a:ea typeface="Times New Roman" pitchFamily="34" charset="-122"/>
-                <a:cs typeface="Times New Roman" pitchFamily="34" charset="-120"/>
-              </a:rPr>
-              <a:t>Greenhouse gases: </a:t>
-            </a:r>
-            <a:pPr algn="l" indent="0" marL="0">
-              <a:spcAft>
-                <a:spcPts val="800"/>
-              </a:spcAft>
-              <a:buNone/>
-            </a:pPr>
-            <a:r>
-              <a:rPr lang="en-US" sz="4000" dirty="0">
-                <a:solidFill>
-                  <a:srgbClr val="111111"/>
-                </a:solidFill>
-                <a:latin typeface="Times New Roman" pitchFamily="34" charset="0"/>
-                <a:ea typeface="Times New Roman" pitchFamily="34" charset="-122"/>
-                <a:cs typeface="Times New Roman" pitchFamily="34" charset="-120"/>
-              </a:rPr>
-              <a:t>They are gases such as carbon dioxide and methane that trap heat in the atmosphere.</a:t>
+              <a:t>It is the rise of the average temperature of the Earth's surface and atmosphere.</a:t>
             </a:r>
             <a:endParaRPr lang="en-US" sz="4000" dirty="0"/>
           </a:p>
@@ -12131,48 +12450,9 @@
           </a:p>
         </p:txBody>
       </p:sp>
-      <p:sp>
-        <p:nvSpPr>
-          <p:cNvPr id="3" name="Text 1"/>
-          <p:cNvSpPr/>
-          <p:nvPr/>
-        </p:nvSpPr>
-        <p:spPr>
-          <a:xfrm>
-            <a:off x="457200" y="1005840"/>
-            <a:ext cx="11277295" cy="731520"/>
-          </a:xfrm>
-          <a:prstGeom prst="rect">
-            <a:avLst/>
-          </a:prstGeom>
-          <a:noFill/>
-          <a:ln/>
-        </p:spPr>
-        <p:txBody>
-          <a:bodyPr wrap="square" lIns="0" tIns="0" rIns="0" bIns="0" rtlCol="0" anchor="ctr"/>
-          <a:lstStyle/>
-          <a:p>
-            <a:pPr algn="ctr" indent="0" marL="0">
-              <a:buNone/>
-            </a:pPr>
-            <a:r>
-              <a:rPr lang="en-US" sz="3600" b="1" dirty="0">
-                <a:solidFill>
-                  <a:srgbClr val="990011"/>
-                </a:solidFill>
-                <a:latin typeface="Times New Roman" pitchFamily="34" charset="0"/>
-                <a:ea typeface="Times New Roman" pitchFamily="34" charset="-122"/>
-                <a:cs typeface="Times New Roman" pitchFamily="34" charset="-120"/>
-              </a:rPr>
-              <a:t>1. Meaning of Global Warming</a:t>
-            </a:r>
-            <a:endParaRPr lang="en-US" sz="3600" dirty="0"/>
-          </a:p>
-        </p:txBody>
-      </p:sp>
       <p:pic>
         <p:nvPicPr>
-          <p:cNvPr id="4" name="Image 0" descr="/home/claude/f4/img/v2/greenhouse_big.png">    </p:cNvPr>
+          <p:cNvPr id="3" name="Image 0" descr="/home/claude/f4/img/minesec_sheet.png">    </p:cNvPr>
           <p:cNvPicPr>
             <a:picLocks noChangeAspect="1"/>
           </p:cNvPicPr>
@@ -12186,14 +12466,55 @@
         </p:blipFill>
         <p:spPr>
           <a:xfrm>
-            <a:off x="629930" y="1783080"/>
-            <a:ext cx="10931835" cy="4270248"/>
+            <a:off x="0" y="658368"/>
+            <a:ext cx="3840480" cy="5833872"/>
           </a:xfrm>
           <a:prstGeom prst="rect">
             <a:avLst/>
           </a:prstGeom>
         </p:spPr>
       </p:pic>
+      <p:sp>
+        <p:nvSpPr>
+          <p:cNvPr id="4" name="Text 1"/>
+          <p:cNvSpPr/>
+          <p:nvPr/>
+        </p:nvSpPr>
+        <p:spPr>
+          <a:xfrm>
+            <a:off x="4069080" y="1005840"/>
+            <a:ext cx="7802575" cy="731520"/>
+          </a:xfrm>
+          <a:prstGeom prst="rect">
+            <a:avLst/>
+          </a:prstGeom>
+          <a:noFill/>
+          <a:ln/>
+        </p:spPr>
+        <p:txBody>
+          <a:bodyPr wrap="square" lIns="0" tIns="0" rIns="0" bIns="0" rtlCol="0" anchor="ctr">
+            <a:normAutofit/>
+          </a:bodyPr>
+          <a:lstStyle/>
+          <a:p>
+            <a:pPr algn="ctr" indent="0" marL="0">
+              <a:buNone/>
+            </a:pPr>
+            <a:r>
+              <a:rPr lang="en-US" sz="3600" b="1" dirty="0">
+                <a:solidFill>
+                  <a:srgbClr val="990011"/>
+                </a:solidFill>
+                <a:latin typeface="Times New Roman" pitchFamily="34" charset="0"/>
+                <a:ea typeface="Times New Roman" pitchFamily="34" charset="-122"/>
+                <a:cs typeface="Times New Roman" pitchFamily="34" charset="-120"/>
+              </a:rPr>
+              <a:t>DEFINITIONS (continued)</a:t>
+            </a:r>
+            <a:endParaRPr lang="en-US" sz="3600" dirty="0"/>
+          </a:p>
+        </p:txBody>
+      </p:sp>
       <p:sp>
         <p:nvSpPr>
           <p:cNvPr id="5" name="Text 2"/>
@@ -12202,8 +12523,8 @@
         </p:nvSpPr>
         <p:spPr>
           <a:xfrm>
-            <a:off x="457200" y="6089904"/>
-            <a:ext cx="11277295" cy="347472"/>
+            <a:off x="4069080" y="1783080"/>
+            <a:ext cx="7802575" cy="4663440"/>
           </a:xfrm>
           <a:prstGeom prst="rect">
             <a:avLst/>
@@ -12212,24 +12533,81 @@
           <a:ln/>
         </p:spPr>
         <p:txBody>
-          <a:bodyPr wrap="square" lIns="0" tIns="0" rIns="0" bIns="0" rtlCol="0" anchor="ctr"/>
-          <a:lstStyle/>
-          <a:p>
-            <a:pPr algn="ctr" indent="0" marL="0">
+          <a:bodyPr wrap="square" lIns="0" tIns="0" rIns="0" bIns="0" rtlCol="0" anchor="t"/>
+          <a:lstStyle/>
+          <a:p>
+            <a:pPr algn="l" indent="0" marL="0">
+              <a:spcAft>
+                <a:spcPts val="800"/>
+              </a:spcAft>
               <a:buNone/>
             </a:pPr>
             <a:r>
-              <a:rPr lang="en-US" sz="1800" i="1" dirty="0">
-                <a:solidFill>
-                  <a:srgbClr val="555555"/>
+              <a:rPr lang="en-US" sz="4000" b="1" dirty="0">
+                <a:solidFill>
+                  <a:srgbClr val="111111"/>
                 </a:solidFill>
                 <a:latin typeface="Times New Roman" pitchFamily="34" charset="0"/>
                 <a:ea typeface="Times New Roman" pitchFamily="34" charset="-122"/>
                 <a:cs typeface="Times New Roman" pitchFamily="34" charset="-120"/>
               </a:rPr>
-              <a:t>Illustration: the greenhouse effect</a:t>
-            </a:r>
-            <a:endParaRPr lang="en-US" sz="1800" dirty="0"/>
+              <a:t>Greenhouse effect: </a:t>
+            </a:r>
+            <a:pPr algn="l" indent="0" marL="0">
+              <a:spcAft>
+                <a:spcPts val="800"/>
+              </a:spcAft>
+              <a:buNone/>
+            </a:pPr>
+            <a:r>
+              <a:rPr lang="en-US" sz="4000" dirty="0">
+                <a:solidFill>
+                  <a:srgbClr val="111111"/>
+                </a:solidFill>
+                <a:latin typeface="Times New Roman" pitchFamily="34" charset="0"/>
+                <a:ea typeface="Times New Roman" pitchFamily="34" charset="-122"/>
+                <a:cs typeface="Times New Roman" pitchFamily="34" charset="-120"/>
+              </a:rPr>
+              <a:t>It is the trapping of the Earth's heat by some gases in the atmosphere.</a:t>
+            </a:r>
+            <a:endParaRPr lang="en-US" sz="4000" dirty="0"/>
+          </a:p>
+          <a:p>
+            <a:pPr algn="l" indent="0" marL="0">
+              <a:spcAft>
+                <a:spcPts val="800"/>
+              </a:spcAft>
+              <a:buNone/>
+            </a:pPr>
+            <a:r>
+              <a:rPr lang="en-US" sz="4000" b="1" dirty="0">
+                <a:solidFill>
+                  <a:srgbClr val="111111"/>
+                </a:solidFill>
+                <a:latin typeface="Times New Roman" pitchFamily="34" charset="0"/>
+                <a:ea typeface="Times New Roman" pitchFamily="34" charset="-122"/>
+                <a:cs typeface="Times New Roman" pitchFamily="34" charset="-120"/>
+              </a:rPr>
+              <a:t>Greenhouse gases: </a:t>
+            </a:r>
+            <a:pPr algn="l" indent="0" marL="0">
+              <a:spcAft>
+                <a:spcPts val="800"/>
+              </a:spcAft>
+              <a:buNone/>
+            </a:pPr>
+            <a:r>
+              <a:rPr lang="en-US" sz="4000" dirty="0">
+                <a:solidFill>
+                  <a:srgbClr val="111111"/>
+                </a:solidFill>
+                <a:latin typeface="Times New Roman" pitchFamily="34" charset="0"/>
+                <a:ea typeface="Times New Roman" pitchFamily="34" charset="-122"/>
+                <a:cs typeface="Times New Roman" pitchFamily="34" charset="-120"/>
+              </a:rPr>
+              <a:t>They are gases such as carbon dioxide, methane and nitrous oxide that trap heat.</a:t>
+            </a:r>
+            <a:endParaRPr lang="en-US" sz="4000" dirty="0"/>
           </a:p>
         </p:txBody>
       </p:sp>
@@ -12345,9 +12723,170 @@
           </a:p>
         </p:txBody>
       </p:sp>
+      <p:sp>
+        <p:nvSpPr>
+          <p:cNvPr id="3" name="Text 1"/>
+          <p:cNvSpPr/>
+          <p:nvPr/>
+        </p:nvSpPr>
+        <p:spPr>
+          <a:xfrm>
+            <a:off x="365760" y="1005840"/>
+            <a:ext cx="11460175" cy="731520"/>
+          </a:xfrm>
+          <a:prstGeom prst="rect">
+            <a:avLst/>
+          </a:prstGeom>
+          <a:noFill/>
+          <a:ln/>
+        </p:spPr>
+        <p:txBody>
+          <a:bodyPr wrap="square" lIns="0" tIns="0" rIns="0" bIns="0" rtlCol="0" anchor="ctr">
+            <a:normAutofit/>
+          </a:bodyPr>
+          <a:lstStyle/>
+          <a:p>
+            <a:pPr algn="ctr" indent="0" marL="0">
+              <a:buNone/>
+            </a:pPr>
+            <a:r>
+              <a:rPr lang="en-US" sz="3600" b="1" dirty="0">
+                <a:solidFill>
+                  <a:srgbClr val="990011"/>
+                </a:solidFill>
+                <a:latin typeface="Times New Roman" pitchFamily="34" charset="0"/>
+                <a:ea typeface="Times New Roman" pitchFamily="34" charset="-122"/>
+                <a:cs typeface="Times New Roman" pitchFamily="34" charset="-120"/>
+              </a:rPr>
+              <a:t>1. Causes of Global Warming</a:t>
+            </a:r>
+            <a:endParaRPr lang="en-US" sz="3600" dirty="0"/>
+          </a:p>
+        </p:txBody>
+      </p:sp>
+      <p:sp>
+        <p:nvSpPr>
+          <p:cNvPr id="4" name="Text 2"/>
+          <p:cNvSpPr/>
+          <p:nvPr/>
+        </p:nvSpPr>
+        <p:spPr>
+          <a:xfrm>
+            <a:off x="365760" y="1737360"/>
+            <a:ext cx="5120640" cy="457200"/>
+          </a:xfrm>
+          <a:prstGeom prst="rect">
+            <a:avLst/>
+          </a:prstGeom>
+          <a:noFill/>
+          <a:ln/>
+        </p:spPr>
+        <p:txBody>
+          <a:bodyPr wrap="square" lIns="0" tIns="0" rIns="0" bIns="0" rtlCol="0" anchor="ctr">
+            <a:normAutofit/>
+          </a:bodyPr>
+          <a:lstStyle/>
+          <a:p>
+            <a:pPr algn="l" indent="0" marL="0">
+              <a:buNone/>
+            </a:pPr>
+            <a:r>
+              <a:rPr lang="en-US" sz="3000" b="1" dirty="0">
+                <a:solidFill>
+                  <a:srgbClr val="990011"/>
+                </a:solidFill>
+                <a:latin typeface="Times New Roman" pitchFamily="34" charset="0"/>
+                <a:ea typeface="Times New Roman" pitchFamily="34" charset="-122"/>
+                <a:cs typeface="Times New Roman" pitchFamily="34" charset="-120"/>
+              </a:rPr>
+              <a:t>A) Human Causes</a:t>
+            </a:r>
+            <a:endParaRPr lang="en-US" sz="3000" dirty="0"/>
+          </a:p>
+        </p:txBody>
+      </p:sp>
+      <p:sp>
+        <p:nvSpPr>
+          <p:cNvPr id="5" name="Text 3"/>
+          <p:cNvSpPr/>
+          <p:nvPr/>
+        </p:nvSpPr>
+        <p:spPr>
+          <a:xfrm>
+            <a:off x="365760" y="2240280"/>
+            <a:ext cx="4846320" cy="4160520"/>
+          </a:xfrm>
+          <a:prstGeom prst="rect">
+            <a:avLst/>
+          </a:prstGeom>
+          <a:noFill/>
+          <a:ln/>
+        </p:spPr>
+        <p:txBody>
+          <a:bodyPr wrap="square" lIns="0" tIns="0" rIns="0" bIns="0" rtlCol="0" anchor="t"/>
+          <a:lstStyle/>
+          <a:p>
+            <a:pPr algn="l" indent="0" marL="0">
+              <a:spcAft>
+                <a:spcPts val="800"/>
+              </a:spcAft>
+              <a:buNone/>
+            </a:pPr>
+            <a:r>
+              <a:rPr lang="en-US" sz="3200" i="1" dirty="0">
+                <a:solidFill>
+                  <a:srgbClr val="111111"/>
+                </a:solidFill>
+                <a:latin typeface="Times New Roman" pitchFamily="34" charset="0"/>
+                <a:ea typeface="Times New Roman" pitchFamily="34" charset="-122"/>
+                <a:cs typeface="Times New Roman" pitchFamily="34" charset="-120"/>
+              </a:rPr>
+              <a:t>Human activities cause global warming as follows:</a:t>
+            </a:r>
+            <a:endParaRPr lang="en-US" sz="3200" dirty="0"/>
+          </a:p>
+          <a:p>
+            <a:pPr algn="l" indent="0" marL="0">
+              <a:spcAft>
+                <a:spcPts val="800"/>
+              </a:spcAft>
+              <a:buNone/>
+            </a:pPr>
+            <a:r>
+              <a:rPr lang="en-US" sz="3200" b="1" dirty="0">
+                <a:solidFill>
+                  <a:srgbClr val="111111"/>
+                </a:solidFill>
+                <a:latin typeface="Times New Roman" pitchFamily="34" charset="0"/>
+                <a:ea typeface="Times New Roman" pitchFamily="34" charset="-122"/>
+                <a:cs typeface="Times New Roman" pitchFamily="34" charset="-120"/>
+              </a:rPr>
+              <a:t>Burning fossil fuels: </a:t>
+            </a:r>
+            <a:pPr algn="l" indent="0" marL="0">
+              <a:spcAft>
+                <a:spcPts val="800"/>
+              </a:spcAft>
+              <a:buNone/>
+            </a:pPr>
+            <a:r>
+              <a:rPr lang="en-US" sz="3200" dirty="0">
+                <a:solidFill>
+                  <a:srgbClr val="111111"/>
+                </a:solidFill>
+                <a:latin typeface="Times New Roman" pitchFamily="34" charset="0"/>
+                <a:ea typeface="Times New Roman" pitchFamily="34" charset="-122"/>
+                <a:cs typeface="Times New Roman" pitchFamily="34" charset="-120"/>
+              </a:rPr>
+              <a:t>Cars, factories and power stations burn petrol, diesel, gas and coal and release carbon dioxide.</a:t>
+            </a:r>
+            <a:endParaRPr lang="en-US" sz="3200" dirty="0"/>
+          </a:p>
+        </p:txBody>
+      </p:sp>
       <p:pic>
         <p:nvPicPr>
-          <p:cNvPr id="3" name="Image 0" descr="/home/claude/f4/img/minesec_sheet.png">    </p:cNvPr>
+          <p:cNvPr id="6" name="Image 0" descr="/home/claude/f4/img/v2/f4_exhaust.jpg">    </p:cNvPr>
           <p:cNvPicPr>
             <a:picLocks noChangeAspect="1"/>
           </p:cNvPicPr>
@@ -12361,8 +12900,8 @@
         </p:blipFill>
         <p:spPr>
           <a:xfrm>
-            <a:off x="0" y="658368"/>
-            <a:ext cx="2468880" cy="5833872"/>
+            <a:off x="5349240" y="2069407"/>
+            <a:ext cx="6659575" cy="3697594"/>
           </a:xfrm>
           <a:prstGeom prst="rect">
             <a:avLst/>
@@ -12371,14 +12910,14 @@
       </p:pic>
       <p:sp>
         <p:nvSpPr>
-          <p:cNvPr id="4" name="Text 1"/>
+          <p:cNvPr id="7" name="Text 4"/>
           <p:cNvSpPr/>
           <p:nvPr/>
         </p:nvSpPr>
         <p:spPr>
           <a:xfrm>
-            <a:off x="2697480" y="1005840"/>
-            <a:ext cx="9174175" cy="731520"/>
+            <a:off x="5349240" y="6089904"/>
+            <a:ext cx="6659575" cy="347472"/>
           </a:xfrm>
           <a:prstGeom prst="rect">
             <a:avLst/>
@@ -12387,142 +12926,24 @@
           <a:ln/>
         </p:spPr>
         <p:txBody>
-          <a:bodyPr wrap="square" lIns="0" tIns="0" rIns="0" bIns="0" rtlCol="0" anchor="ctr">
-            <a:normAutofit/>
-          </a:bodyPr>
+          <a:bodyPr wrap="square" lIns="0" tIns="0" rIns="0" bIns="0" rtlCol="0" anchor="ctr"/>
           <a:lstStyle/>
           <a:p>
             <a:pPr algn="ctr" indent="0" marL="0">
               <a:buNone/>
             </a:pPr>
             <a:r>
-              <a:rPr lang="en-US" sz="3600" b="1" dirty="0">
-                <a:solidFill>
-                  <a:srgbClr val="990011"/>
+              <a:rPr lang="en-US" sz="1600" i="1" dirty="0">
+                <a:solidFill>
+                  <a:srgbClr val="555555"/>
                 </a:solidFill>
                 <a:latin typeface="Times New Roman" pitchFamily="34" charset="0"/>
                 <a:ea typeface="Times New Roman" pitchFamily="34" charset="-122"/>
                 <a:cs typeface="Times New Roman" pitchFamily="34" charset="-120"/>
               </a:rPr>
-              <a:t>2. Causes of Global Warming</a:t>
-            </a:r>
-            <a:endParaRPr lang="en-US" sz="3600" dirty="0"/>
-          </a:p>
-        </p:txBody>
-      </p:sp>
-      <p:sp>
-        <p:nvSpPr>
-          <p:cNvPr id="5" name="Text 2"/>
-          <p:cNvSpPr/>
-          <p:nvPr/>
-        </p:nvSpPr>
-        <p:spPr>
-          <a:xfrm>
-            <a:off x="2697480" y="1783080"/>
-            <a:ext cx="9174175" cy="4663440"/>
-          </a:xfrm>
-          <a:prstGeom prst="rect">
-            <a:avLst/>
-          </a:prstGeom>
-          <a:noFill/>
-          <a:ln/>
-        </p:spPr>
-        <p:txBody>
-          <a:bodyPr wrap="square" lIns="0" tIns="0" rIns="0" bIns="0" rtlCol="0" anchor="t"/>
-          <a:lstStyle/>
-          <a:p>
-            <a:pPr algn="l" indent="0" marL="0">
-              <a:spcAft>
-                <a:spcPts val="800"/>
-              </a:spcAft>
-              <a:buNone/>
-            </a:pPr>
-            <a:r>
-              <a:rPr lang="en-US" sz="4000" i="1" dirty="0">
-                <a:solidFill>
-                  <a:srgbClr val="111111"/>
-                </a:solidFill>
-                <a:latin typeface="Times New Roman" pitchFamily="34" charset="0"/>
-                <a:ea typeface="Times New Roman" pitchFamily="34" charset="-122"/>
-                <a:cs typeface="Times New Roman" pitchFamily="34" charset="-120"/>
-              </a:rPr>
-              <a:t>Global warming has the following causes:</a:t>
-            </a:r>
-            <a:endParaRPr lang="en-US" sz="4000" dirty="0"/>
-          </a:p>
-          <a:p>
-            <a:pPr algn="l" indent="0" marL="0">
-              <a:spcAft>
-                <a:spcPts val="800"/>
-              </a:spcAft>
-              <a:buNone/>
-            </a:pPr>
-            <a:r>
-              <a:rPr lang="en-US" sz="4000" b="1" dirty="0">
-                <a:solidFill>
-                  <a:srgbClr val="111111"/>
-                </a:solidFill>
-                <a:latin typeface="Times New Roman" pitchFamily="34" charset="0"/>
-                <a:ea typeface="Times New Roman" pitchFamily="34" charset="-122"/>
-                <a:cs typeface="Times New Roman" pitchFamily="34" charset="-120"/>
-              </a:rPr>
-              <a:t>Burning fuels: </a:t>
-            </a:r>
-            <a:pPr algn="l" indent="0" marL="0">
-              <a:spcAft>
-                <a:spcPts val="800"/>
-              </a:spcAft>
-              <a:buNone/>
-            </a:pPr>
-            <a:r>
-              <a:rPr lang="en-US" sz="4000" dirty="0">
-                <a:solidFill>
-                  <a:srgbClr val="111111"/>
-                </a:solidFill>
-                <a:latin typeface="Times New Roman" pitchFamily="34" charset="0"/>
-                <a:ea typeface="Times New Roman" pitchFamily="34" charset="-122"/>
-                <a:cs typeface="Times New Roman" pitchFamily="34" charset="-120"/>
-              </a:rPr>
-              <a:t>Burning petrol, diesel, coal and firewood releases carbon dioxide.</a:t>
-            </a:r>
-            <a:endParaRPr lang="en-US" sz="4000" dirty="0"/>
-          </a:p>
-          <a:p>
-            <a:pPr algn="l" indent="0" marL="0">
-              <a:spcAft>
-                <a:spcPts val="800"/>
-              </a:spcAft>
-              <a:buNone/>
-            </a:pPr>
-            <a:r>
-              <a:rPr lang="en-US" sz="4000" b="1" dirty="0">
-                <a:solidFill>
-                  <a:srgbClr val="111111"/>
-                </a:solidFill>
-                <a:latin typeface="Times New Roman" pitchFamily="34" charset="0"/>
-                <a:ea typeface="Times New Roman" pitchFamily="34" charset="-122"/>
-                <a:cs typeface="Times New Roman" pitchFamily="34" charset="-120"/>
-              </a:rPr>
-              <a:t>Deforestation: </a:t>
-            </a:r>
-            <a:pPr algn="l" indent="0" marL="0">
-              <a:spcAft>
-                <a:spcPts val="800"/>
-              </a:spcAft>
-              <a:buNone/>
-            </a:pPr>
-            <a:r>
-              <a:rPr lang="en-US" sz="4000" dirty="0">
-                <a:solidFill>
-                  <a:srgbClr val="111111"/>
-                </a:solidFill>
-                <a:latin typeface="Times New Roman" pitchFamily="34" charset="0"/>
-                <a:ea typeface="Times New Roman" pitchFamily="34" charset="-122"/>
-                <a:cs typeface="Times New Roman" pitchFamily="34" charset="-120"/>
-              </a:rPr>
-              <a:t>Cutting trees leaves fewer plants to take in carbon dioxide.</a:t>
-            </a:r>
-            <a:endParaRPr lang="en-US" sz="4000" dirty="0"/>
+              <a:t>Illustration: exhaust smoke</a:t>
+            </a:r>
+            <a:endParaRPr lang="en-US" sz="1600" dirty="0"/>
           </a:p>
         </p:txBody>
       </p:sp>
@@ -12655,7 +13076,7 @@
         <p:spPr>
           <a:xfrm>
             <a:off x="0" y="658368"/>
-            <a:ext cx="5120640" cy="5833872"/>
+            <a:ext cx="1463040" cy="5833872"/>
           </a:xfrm>
           <a:prstGeom prst="rect">
             <a:avLst/>
@@ -12670,8 +13091,8 @@
         </p:nvSpPr>
         <p:spPr>
           <a:xfrm>
-            <a:off x="5349240" y="1005840"/>
-            <a:ext cx="6522415" cy="731520"/>
+            <a:off x="1691640" y="1005840"/>
+            <a:ext cx="10180015" cy="731520"/>
           </a:xfrm>
           <a:prstGeom prst="rect">
             <a:avLst/>
@@ -12697,7 +13118,7 @@
                 <a:ea typeface="Times New Roman" pitchFamily="34" charset="-122"/>
                 <a:cs typeface="Times New Roman" pitchFamily="34" charset="-120"/>
               </a:rPr>
-              <a:t>2. Causes of Global Warming (continued)</a:t>
+              <a:t>1. Causes of Global Warming</a:t>
             </a:r>
             <a:endParaRPr lang="en-US" sz="3600" dirty="0"/>
           </a:p>
@@ -12711,8 +13132,47 @@
         </p:nvSpPr>
         <p:spPr>
           <a:xfrm>
-            <a:off x="5349240" y="1783080"/>
-            <a:ext cx="6522415" cy="4663440"/>
+            <a:off x="1691640" y="1737360"/>
+            <a:ext cx="10180015" cy="457200"/>
+          </a:xfrm>
+          <a:prstGeom prst="rect">
+            <a:avLst/>
+          </a:prstGeom>
+          <a:noFill/>
+          <a:ln/>
+        </p:spPr>
+        <p:txBody>
+          <a:bodyPr wrap="square" lIns="0" tIns="0" rIns="0" bIns="0" rtlCol="0" anchor="ctr"/>
+          <a:lstStyle/>
+          <a:p>
+            <a:pPr algn="l" indent="0" marL="0">
+              <a:buNone/>
+            </a:pPr>
+            <a:r>
+              <a:rPr lang="en-US" sz="3200" b="1" dirty="0">
+                <a:solidFill>
+                  <a:srgbClr val="990011"/>
+                </a:solidFill>
+                <a:latin typeface="Times New Roman" pitchFamily="34" charset="0"/>
+                <a:ea typeface="Times New Roman" pitchFamily="34" charset="-122"/>
+                <a:cs typeface="Times New Roman" pitchFamily="34" charset="-120"/>
+              </a:rPr>
+              <a:t>A) Human Causes</a:t>
+            </a:r>
+            <a:endParaRPr lang="en-US" sz="3200" dirty="0"/>
+          </a:p>
+        </p:txBody>
+      </p:sp>
+      <p:sp>
+        <p:nvSpPr>
+          <p:cNvPr id="6" name="Text 3"/>
+          <p:cNvSpPr/>
+          <p:nvPr/>
+        </p:nvSpPr>
+        <p:spPr>
+          <a:xfrm>
+            <a:off x="1691640" y="2240280"/>
+            <a:ext cx="10180015" cy="4206240"/>
           </a:xfrm>
           <a:prstGeom prst="rect">
             <a:avLst/>
@@ -12739,7 +13199,7 @@
                 <a:ea typeface="Times New Roman" pitchFamily="34" charset="-122"/>
                 <a:cs typeface="Times New Roman" pitchFamily="34" charset="-120"/>
               </a:rPr>
-              <a:t>Natural causes: </a:t>
+              <a:t>Deforestation and bush fires: </a:t>
             </a:r>
             <a:pPr algn="l" indent="0" marL="0">
               <a:spcAft>
@@ -12756,7 +13216,44 @@
                 <a:ea typeface="Times New Roman" pitchFamily="34" charset="-122"/>
                 <a:cs typeface="Times New Roman" pitchFamily="34" charset="-120"/>
               </a:rPr>
-              <a:t>Changes in the Sun's energy and volcanic eruptions also change temperatures.</a:t>
+              <a:t>Cutting and burning trees releases carbon dioxide and leaves fewer plants to absorb it.</a:t>
+            </a:r>
+            <a:endParaRPr lang="en-US" sz="4000" dirty="0"/>
+          </a:p>
+          <a:p>
+            <a:pPr algn="l" indent="0" marL="0">
+              <a:spcAft>
+                <a:spcPts val="800"/>
+              </a:spcAft>
+              <a:buNone/>
+            </a:pPr>
+            <a:r>
+              <a:rPr lang="en-US" sz="4000" b="1" dirty="0">
+                <a:solidFill>
+                  <a:srgbClr val="111111"/>
+                </a:solidFill>
+                <a:latin typeface="Times New Roman" pitchFamily="34" charset="0"/>
+                <a:ea typeface="Times New Roman" pitchFamily="34" charset="-122"/>
+                <a:cs typeface="Times New Roman" pitchFamily="34" charset="-120"/>
+              </a:rPr>
+              <a:t>Agriculture: </a:t>
+            </a:r>
+            <a:pPr algn="l" indent="0" marL="0">
+              <a:spcAft>
+                <a:spcPts val="800"/>
+              </a:spcAft>
+              <a:buNone/>
+            </a:pPr>
+            <a:r>
+              <a:rPr lang="en-US" sz="4000" dirty="0">
+                <a:solidFill>
+                  <a:srgbClr val="111111"/>
+                </a:solidFill>
+                <a:latin typeface="Times New Roman" pitchFamily="34" charset="0"/>
+                <a:ea typeface="Times New Roman" pitchFamily="34" charset="-122"/>
+                <a:cs typeface="Times New Roman" pitchFamily="34" charset="-120"/>
+              </a:rPr>
+              <a:t>Cattle and rice fields release methane, and fertilisers release nitrous oxide.</a:t>
             </a:r>
             <a:endParaRPr lang="en-US" sz="4000" dirty="0"/>
           </a:p>
@@ -12891,7 +13388,7 @@
         <p:spPr>
           <a:xfrm>
             <a:off x="0" y="658368"/>
-            <a:ext cx="2468880" cy="5833872"/>
+            <a:ext cx="5120640" cy="5833872"/>
           </a:xfrm>
           <a:prstGeom prst="rect">
             <a:avLst/>
@@ -12906,8 +13403,8 @@
         </p:nvSpPr>
         <p:spPr>
           <a:xfrm>
-            <a:off x="2697480" y="1005840"/>
-            <a:ext cx="9174175" cy="731520"/>
+            <a:off x="5349240" y="1005840"/>
+            <a:ext cx="6522415" cy="731520"/>
           </a:xfrm>
           <a:prstGeom prst="rect">
             <a:avLst/>
@@ -12933,7 +13430,7 @@
                 <a:ea typeface="Times New Roman" pitchFamily="34" charset="-122"/>
                 <a:cs typeface="Times New Roman" pitchFamily="34" charset="-120"/>
               </a:rPr>
-              <a:t>3. Effects of Global Warming</a:t>
+              <a:t>1. Causes of Global Warming</a:t>
             </a:r>
             <a:endParaRPr lang="en-US" sz="3600" dirty="0"/>
           </a:p>
@@ -12947,8 +13444,47 @@
         </p:nvSpPr>
         <p:spPr>
           <a:xfrm>
-            <a:off x="2697480" y="1783080"/>
-            <a:ext cx="9174175" cy="4663440"/>
+            <a:off x="5349240" y="1737360"/>
+            <a:ext cx="6522415" cy="457200"/>
+          </a:xfrm>
+          <a:prstGeom prst="rect">
+            <a:avLst/>
+          </a:prstGeom>
+          <a:noFill/>
+          <a:ln/>
+        </p:spPr>
+        <p:txBody>
+          <a:bodyPr wrap="square" lIns="0" tIns="0" rIns="0" bIns="0" rtlCol="0" anchor="ctr"/>
+          <a:lstStyle/>
+          <a:p>
+            <a:pPr algn="l" indent="0" marL="0">
+              <a:buNone/>
+            </a:pPr>
+            <a:r>
+              <a:rPr lang="en-US" sz="3200" b="1" dirty="0">
+                <a:solidFill>
+                  <a:srgbClr val="990011"/>
+                </a:solidFill>
+                <a:latin typeface="Times New Roman" pitchFamily="34" charset="0"/>
+                <a:ea typeface="Times New Roman" pitchFamily="34" charset="-122"/>
+                <a:cs typeface="Times New Roman" pitchFamily="34" charset="-120"/>
+              </a:rPr>
+              <a:t>A) Human Causes (continued)</a:t>
+            </a:r>
+            <a:endParaRPr lang="en-US" sz="3200" dirty="0"/>
+          </a:p>
+        </p:txBody>
+      </p:sp>
+      <p:sp>
+        <p:nvSpPr>
+          <p:cNvPr id="6" name="Text 3"/>
+          <p:cNvSpPr/>
+          <p:nvPr/>
+        </p:nvSpPr>
+        <p:spPr>
+          <a:xfrm>
+            <a:off x="5349240" y="2240280"/>
+            <a:ext cx="6522415" cy="4206240"/>
           </a:xfrm>
           <a:prstGeom prst="rect">
             <a:avLst/>
@@ -12967,7 +13503,7 @@
               <a:buNone/>
             </a:pPr>
             <a:r>
-              <a:rPr lang="en-US" sz="4000" i="1" dirty="0">
+              <a:rPr lang="en-US" sz="4000" b="1" dirty="0">
                 <a:solidFill>
                   <a:srgbClr val="111111"/>
                 </a:solidFill>
@@ -12975,11 +13511,8 @@
                 <a:ea typeface="Times New Roman" pitchFamily="34" charset="-122"/>
                 <a:cs typeface="Times New Roman" pitchFamily="34" charset="-120"/>
               </a:rPr>
-              <a:t>Global warming has the following effects:</a:t>
-            </a:r>
-            <a:endParaRPr lang="en-US" sz="4000" dirty="0"/>
-          </a:p>
-          <a:p>
+              <a:t>Waste: </a:t>
+            </a:r>
             <a:pPr algn="l" indent="0" marL="0">
               <a:spcAft>
                 <a:spcPts val="800"/>
@@ -12987,7 +13520,7 @@
               <a:buNone/>
             </a:pPr>
             <a:r>
-              <a:rPr lang="en-US" sz="4000" b="1" dirty="0">
+              <a:rPr lang="en-US" sz="4000" dirty="0">
                 <a:solidFill>
                   <a:srgbClr val="111111"/>
                 </a:solidFill>
@@ -12995,61 +13528,7 @@
                 <a:ea typeface="Times New Roman" pitchFamily="34" charset="-122"/>
                 <a:cs typeface="Times New Roman" pitchFamily="34" charset="-120"/>
               </a:rPr>
-              <a:t>Extreme weather: </a:t>
-            </a:r>
-            <a:pPr algn="l" indent="0" marL="0">
-              <a:spcAft>
-                <a:spcPts val="800"/>
-              </a:spcAft>
-              <a:buNone/>
-            </a:pPr>
-            <a:r>
-              <a:rPr lang="en-US" sz="4000" dirty="0">
-                <a:solidFill>
-                  <a:srgbClr val="111111"/>
-                </a:solidFill>
-                <a:latin typeface="Times New Roman" pitchFamily="34" charset="0"/>
-                <a:ea typeface="Times New Roman" pitchFamily="34" charset="-122"/>
-                <a:cs typeface="Times New Roman" pitchFamily="34" charset="-120"/>
-              </a:rPr>
-              <a:t>Heat waves, droughts and floods become more frequent.</a:t>
-            </a:r>
-            <a:endParaRPr lang="en-US" sz="4000" dirty="0"/>
-          </a:p>
-          <a:p>
-            <a:pPr algn="l" indent="0" marL="0">
-              <a:spcAft>
-                <a:spcPts val="800"/>
-              </a:spcAft>
-              <a:buNone/>
-            </a:pPr>
-            <a:r>
-              <a:rPr lang="en-US" sz="4000" b="1" dirty="0">
-                <a:solidFill>
-                  <a:srgbClr val="111111"/>
-                </a:solidFill>
-                <a:latin typeface="Times New Roman" pitchFamily="34" charset="0"/>
-                <a:ea typeface="Times New Roman" pitchFamily="34" charset="-122"/>
-                <a:cs typeface="Times New Roman" pitchFamily="34" charset="-120"/>
-              </a:rPr>
-              <a:t>Sea-level rise: </a:t>
-            </a:r>
-            <a:pPr algn="l" indent="0" marL="0">
-              <a:spcAft>
-                <a:spcPts val="800"/>
-              </a:spcAft>
-              <a:buNone/>
-            </a:pPr>
-            <a:r>
-              <a:rPr lang="en-US" sz="4000" dirty="0">
-                <a:solidFill>
-                  <a:srgbClr val="111111"/>
-                </a:solidFill>
-                <a:latin typeface="Times New Roman" pitchFamily="34" charset="0"/>
-                <a:ea typeface="Times New Roman" pitchFamily="34" charset="-122"/>
-                <a:cs typeface="Times New Roman" pitchFamily="34" charset="-120"/>
-              </a:rPr>
-              <a:t>Melting ice raises the sea level and threatens Douala and Limbe.</a:t>
+              <a:t>Rotting rubbish in dumps releases methane.</a:t>
             </a:r>
             <a:endParaRPr lang="en-US" sz="4000" dirty="0"/>
           </a:p>
@@ -13184,7 +13663,7 @@
         <p:spPr>
           <a:xfrm>
             <a:off x="0" y="658368"/>
-            <a:ext cx="5120640" cy="5833872"/>
+            <a:ext cx="2468880" cy="5833872"/>
           </a:xfrm>
           <a:prstGeom prst="rect">
             <a:avLst/>
@@ -13199,8 +13678,8 @@
         </p:nvSpPr>
         <p:spPr>
           <a:xfrm>
-            <a:off x="5349240" y="1005840"/>
-            <a:ext cx="6522415" cy="731520"/>
+            <a:off x="2697480" y="1005840"/>
+            <a:ext cx="9174175" cy="731520"/>
           </a:xfrm>
           <a:prstGeom prst="rect">
             <a:avLst/>
@@ -13226,7 +13705,7 @@
                 <a:ea typeface="Times New Roman" pitchFamily="34" charset="-122"/>
                 <a:cs typeface="Times New Roman" pitchFamily="34" charset="-120"/>
               </a:rPr>
-              <a:t>3. Effects of Global Warming (continued)</a:t>
+              <a:t>1. Causes of Global Warming</a:t>
             </a:r>
             <a:endParaRPr lang="en-US" sz="3600" dirty="0"/>
           </a:p>
@@ -13240,8 +13719,47 @@
         </p:nvSpPr>
         <p:spPr>
           <a:xfrm>
-            <a:off x="5349240" y="1783080"/>
-            <a:ext cx="6522415" cy="4663440"/>
+            <a:off x="2697480" y="1737360"/>
+            <a:ext cx="9174175" cy="457200"/>
+          </a:xfrm>
+          <a:prstGeom prst="rect">
+            <a:avLst/>
+          </a:prstGeom>
+          <a:noFill/>
+          <a:ln/>
+        </p:spPr>
+        <p:txBody>
+          <a:bodyPr wrap="square" lIns="0" tIns="0" rIns="0" bIns="0" rtlCol="0" anchor="ctr"/>
+          <a:lstStyle/>
+          <a:p>
+            <a:pPr algn="l" indent="0" marL="0">
+              <a:buNone/>
+            </a:pPr>
+            <a:r>
+              <a:rPr lang="en-US" sz="3200" b="1" dirty="0">
+                <a:solidFill>
+                  <a:srgbClr val="990011"/>
+                </a:solidFill>
+                <a:latin typeface="Times New Roman" pitchFamily="34" charset="0"/>
+                <a:ea typeface="Times New Roman" pitchFamily="34" charset="-122"/>
+                <a:cs typeface="Times New Roman" pitchFamily="34" charset="-120"/>
+              </a:rPr>
+              <a:t>B) Natural Causes</a:t>
+            </a:r>
+            <a:endParaRPr lang="en-US" sz="3200" dirty="0"/>
+          </a:p>
+        </p:txBody>
+      </p:sp>
+      <p:sp>
+        <p:nvSpPr>
+          <p:cNvPr id="6" name="Text 3"/>
+          <p:cNvSpPr/>
+          <p:nvPr/>
+        </p:nvSpPr>
+        <p:spPr>
+          <a:xfrm>
+            <a:off x="2697480" y="2240280"/>
+            <a:ext cx="9174175" cy="4206240"/>
           </a:xfrm>
           <a:prstGeom prst="rect">
             <a:avLst/>
@@ -13260,7 +13778,7 @@
               <a:buNone/>
             </a:pPr>
             <a:r>
-              <a:rPr lang="en-US" sz="4000" b="1" dirty="0">
+              <a:rPr lang="en-US" sz="4000" i="1" dirty="0">
                 <a:solidFill>
                   <a:srgbClr val="111111"/>
                 </a:solidFill>
@@ -13268,8 +13786,11 @@
                 <a:ea typeface="Times New Roman" pitchFamily="34" charset="-122"/>
                 <a:cs typeface="Times New Roman" pitchFamily="34" charset="-120"/>
               </a:rPr>
-              <a:t>Farming: </a:t>
-            </a:r>
+              <a:t>Natural factors also change the temperature of the Earth:</a:t>
+            </a:r>
+            <a:endParaRPr lang="en-US" sz="4000" dirty="0"/>
+          </a:p>
+          <a:p>
             <a:pPr algn="l" indent="0" marL="0">
               <a:spcAft>
                 <a:spcPts val="800"/>
@@ -13277,7 +13798,7 @@
               <a:buNone/>
             </a:pPr>
             <a:r>
-              <a:rPr lang="en-US" sz="4000" dirty="0">
+              <a:rPr lang="en-US" sz="4000" b="1" dirty="0">
                 <a:solidFill>
                   <a:srgbClr val="111111"/>
                 </a:solidFill>
@@ -13285,7 +13806,61 @@
                 <a:ea typeface="Times New Roman" pitchFamily="34" charset="-122"/>
                 <a:cs typeface="Times New Roman" pitchFamily="34" charset="-120"/>
               </a:rPr>
-              <a:t>Irregular rains lead to poorer harvests.</a:t>
+              <a:t>Changes in the Sun: </a:t>
+            </a:r>
+            <a:pPr algn="l" indent="0" marL="0">
+              <a:spcAft>
+                <a:spcPts val="800"/>
+              </a:spcAft>
+              <a:buNone/>
+            </a:pPr>
+            <a:r>
+              <a:rPr lang="en-US" sz="4000" dirty="0">
+                <a:solidFill>
+                  <a:srgbClr val="111111"/>
+                </a:solidFill>
+                <a:latin typeface="Times New Roman" pitchFamily="34" charset="0"/>
+                <a:ea typeface="Times New Roman" pitchFamily="34" charset="-122"/>
+                <a:cs typeface="Times New Roman" pitchFamily="34" charset="-120"/>
+              </a:rPr>
+              <a:t>The energy given out by the Sun changes slightly over time.</a:t>
+            </a:r>
+            <a:endParaRPr lang="en-US" sz="4000" dirty="0"/>
+          </a:p>
+          <a:p>
+            <a:pPr algn="l" indent="0" marL="0">
+              <a:spcAft>
+                <a:spcPts val="800"/>
+              </a:spcAft>
+              <a:buNone/>
+            </a:pPr>
+            <a:r>
+              <a:rPr lang="en-US" sz="4000" b="1" dirty="0">
+                <a:solidFill>
+                  <a:srgbClr val="111111"/>
+                </a:solidFill>
+                <a:latin typeface="Times New Roman" pitchFamily="34" charset="0"/>
+                <a:ea typeface="Times New Roman" pitchFamily="34" charset="-122"/>
+                <a:cs typeface="Times New Roman" pitchFamily="34" charset="-120"/>
+              </a:rPr>
+              <a:t>Volcanic eruptions: </a:t>
+            </a:r>
+            <a:pPr algn="l" indent="0" marL="0">
+              <a:spcAft>
+                <a:spcPts val="800"/>
+              </a:spcAft>
+              <a:buNone/>
+            </a:pPr>
+            <a:r>
+              <a:rPr lang="en-US" sz="4000" dirty="0">
+                <a:solidFill>
+                  <a:srgbClr val="111111"/>
+                </a:solidFill>
+                <a:latin typeface="Times New Roman" pitchFamily="34" charset="0"/>
+                <a:ea typeface="Times New Roman" pitchFamily="34" charset="-122"/>
+                <a:cs typeface="Times New Roman" pitchFamily="34" charset="-120"/>
+              </a:rPr>
+              <a:t>Eruptions release gases, including carbon dioxide.</a:t>
             </a:r>
             <a:endParaRPr lang="en-US" sz="4000" dirty="0"/>
           </a:p>
@@ -13403,9 +13978,150 @@
           </a:p>
         </p:txBody>
       </p:sp>
+      <p:sp>
+        <p:nvSpPr>
+          <p:cNvPr id="3" name="Text 1"/>
+          <p:cNvSpPr/>
+          <p:nvPr/>
+        </p:nvSpPr>
+        <p:spPr>
+          <a:xfrm>
+            <a:off x="365760" y="1005840"/>
+            <a:ext cx="11460175" cy="731520"/>
+          </a:xfrm>
+          <a:prstGeom prst="rect">
+            <a:avLst/>
+          </a:prstGeom>
+          <a:noFill/>
+          <a:ln/>
+        </p:spPr>
+        <p:txBody>
+          <a:bodyPr wrap="square" lIns="0" tIns="0" rIns="0" bIns="0" rtlCol="0" anchor="ctr">
+            <a:normAutofit/>
+          </a:bodyPr>
+          <a:lstStyle/>
+          <a:p>
+            <a:pPr algn="ctr" indent="0" marL="0">
+              <a:buNone/>
+            </a:pPr>
+            <a:r>
+              <a:rPr lang="en-US" sz="3600" b="1" dirty="0">
+                <a:solidFill>
+                  <a:srgbClr val="990011"/>
+                </a:solidFill>
+                <a:latin typeface="Times New Roman" pitchFamily="34" charset="0"/>
+                <a:ea typeface="Times New Roman" pitchFamily="34" charset="-122"/>
+                <a:cs typeface="Times New Roman" pitchFamily="34" charset="-120"/>
+              </a:rPr>
+              <a:t>1. Causes of Global Warming</a:t>
+            </a:r>
+            <a:endParaRPr lang="en-US" sz="3600" dirty="0"/>
+          </a:p>
+        </p:txBody>
+      </p:sp>
+      <p:sp>
+        <p:nvSpPr>
+          <p:cNvPr id="4" name="Text 2"/>
+          <p:cNvSpPr/>
+          <p:nvPr/>
+        </p:nvSpPr>
+        <p:spPr>
+          <a:xfrm>
+            <a:off x="365760" y="1737360"/>
+            <a:ext cx="5120640" cy="457200"/>
+          </a:xfrm>
+          <a:prstGeom prst="rect">
+            <a:avLst/>
+          </a:prstGeom>
+          <a:noFill/>
+          <a:ln/>
+        </p:spPr>
+        <p:txBody>
+          <a:bodyPr wrap="square" lIns="0" tIns="0" rIns="0" bIns="0" rtlCol="0" anchor="ctr">
+            <a:normAutofit/>
+          </a:bodyPr>
+          <a:lstStyle/>
+          <a:p>
+            <a:pPr algn="l" indent="0" marL="0">
+              <a:buNone/>
+            </a:pPr>
+            <a:r>
+              <a:rPr lang="en-US" sz="3000" b="1" dirty="0">
+                <a:solidFill>
+                  <a:srgbClr val="990011"/>
+                </a:solidFill>
+                <a:latin typeface="Times New Roman" pitchFamily="34" charset="0"/>
+                <a:ea typeface="Times New Roman" pitchFamily="34" charset="-122"/>
+                <a:cs typeface="Times New Roman" pitchFamily="34" charset="-120"/>
+              </a:rPr>
+              <a:t>B) Natural Causes</a:t>
+            </a:r>
+            <a:endParaRPr lang="en-US" sz="3000" dirty="0"/>
+          </a:p>
+        </p:txBody>
+      </p:sp>
+      <p:sp>
+        <p:nvSpPr>
+          <p:cNvPr id="5" name="Text 3"/>
+          <p:cNvSpPr/>
+          <p:nvPr/>
+        </p:nvSpPr>
+        <p:spPr>
+          <a:xfrm>
+            <a:off x="365760" y="2240280"/>
+            <a:ext cx="4846320" cy="4160520"/>
+          </a:xfrm>
+          <a:prstGeom prst="rect">
+            <a:avLst/>
+          </a:prstGeom>
+          <a:noFill/>
+          <a:ln/>
+        </p:spPr>
+        <p:txBody>
+          <a:bodyPr wrap="square" lIns="0" tIns="0" rIns="0" bIns="0" rtlCol="0" anchor="t"/>
+          <a:lstStyle/>
+          <a:p>
+            <a:pPr algn="l" indent="0" marL="0">
+              <a:spcAft>
+                <a:spcPts val="800"/>
+              </a:spcAft>
+              <a:buNone/>
+            </a:pPr>
+            <a:r>
+              <a:rPr lang="en-US" sz="3600" b="1" dirty="0">
+                <a:solidFill>
+                  <a:srgbClr val="111111"/>
+                </a:solidFill>
+                <a:latin typeface="Times New Roman" pitchFamily="34" charset="0"/>
+                <a:ea typeface="Times New Roman" pitchFamily="34" charset="-122"/>
+                <a:cs typeface="Times New Roman" pitchFamily="34" charset="-120"/>
+              </a:rPr>
+              <a:t>Natural greenhouse effect: </a:t>
+            </a:r>
+            <a:pPr algn="l" indent="0" marL="0">
+              <a:spcAft>
+                <a:spcPts val="800"/>
+              </a:spcAft>
+              <a:buNone/>
+            </a:pPr>
+            <a:r>
+              <a:rPr lang="en-US" sz="3600" dirty="0">
+                <a:solidFill>
+                  <a:srgbClr val="111111"/>
+                </a:solidFill>
+                <a:latin typeface="Times New Roman" pitchFamily="34" charset="0"/>
+                <a:ea typeface="Times New Roman" pitchFamily="34" charset="-122"/>
+                <a:cs typeface="Times New Roman" pitchFamily="34" charset="-120"/>
+              </a:rPr>
+              <a:t>Water vapour and natural carbon dioxide keep the Earth warm enough for life.</a:t>
+            </a:r>
+            <a:endParaRPr lang="en-US" sz="3600" dirty="0"/>
+          </a:p>
+        </p:txBody>
+      </p:sp>
       <p:pic>
         <p:nvPicPr>
-          <p:cNvPr id="3" name="Image 0" descr="/home/claude/f4/img/minesec_sheet.png">    </p:cNvPr>
+          <p:cNvPr id="6" name="Image 0" descr="/home/claude/f4/img/v2/greenhouse_big.png">    </p:cNvPr>
           <p:cNvPicPr>
             <a:picLocks noChangeAspect="1"/>
           </p:cNvPicPr>
@@ -13419,8 +14135,8 @@
         </p:blipFill>
         <p:spPr>
           <a:xfrm>
-            <a:off x="0" y="658368"/>
-            <a:ext cx="5120640" cy="5833872"/>
+            <a:off x="5349240" y="2617506"/>
+            <a:ext cx="6659575" cy="2601397"/>
           </a:xfrm>
           <a:prstGeom prst="rect">
             <a:avLst/>
@@ -13429,14 +14145,14 @@
       </p:pic>
       <p:sp>
         <p:nvSpPr>
-          <p:cNvPr id="4" name="Text 1"/>
+          <p:cNvPr id="7" name="Text 4"/>
           <p:cNvSpPr/>
           <p:nvPr/>
         </p:nvSpPr>
         <p:spPr>
           <a:xfrm>
-            <a:off x="5349240" y="1005840"/>
-            <a:ext cx="6522415" cy="731520"/>
+            <a:off x="5349240" y="6089904"/>
+            <a:ext cx="6659575" cy="347472"/>
           </a:xfrm>
           <a:prstGeom prst="rect">
             <a:avLst/>
@@ -13445,105 +14161,24 @@
           <a:ln/>
         </p:spPr>
         <p:txBody>
-          <a:bodyPr wrap="square" lIns="0" tIns="0" rIns="0" bIns="0" rtlCol="0" anchor="ctr">
-            <a:normAutofit/>
-          </a:bodyPr>
+          <a:bodyPr wrap="square" lIns="0" tIns="0" rIns="0" bIns="0" rtlCol="0" anchor="ctr"/>
           <a:lstStyle/>
           <a:p>
             <a:pPr algn="ctr" indent="0" marL="0">
               <a:buNone/>
             </a:pPr>
             <a:r>
-              <a:rPr lang="en-US" sz="3600" b="1" dirty="0">
-                <a:solidFill>
-                  <a:srgbClr val="990011"/>
+              <a:rPr lang="en-US" sz="1600" i="1" dirty="0">
+                <a:solidFill>
+                  <a:srgbClr val="555555"/>
                 </a:solidFill>
                 <a:latin typeface="Times New Roman" pitchFamily="34" charset="0"/>
                 <a:ea typeface="Times New Roman" pitchFamily="34" charset="-122"/>
                 <a:cs typeface="Times New Roman" pitchFamily="34" charset="-120"/>
               </a:rPr>
-              <a:t>4. Adaptation and Mitigation</a:t>
-            </a:r>
-            <a:endParaRPr lang="en-US" sz="3600" dirty="0"/>
-          </a:p>
-        </p:txBody>
-      </p:sp>
-      <p:sp>
-        <p:nvSpPr>
-          <p:cNvPr id="5" name="Text 2"/>
-          <p:cNvSpPr/>
-          <p:nvPr/>
-        </p:nvSpPr>
-        <p:spPr>
-          <a:xfrm>
-            <a:off x="5349240" y="1783080"/>
-            <a:ext cx="6522415" cy="4663440"/>
-          </a:xfrm>
-          <a:prstGeom prst="rect">
-            <a:avLst/>
-          </a:prstGeom>
-          <a:noFill/>
-          <a:ln/>
-        </p:spPr>
-        <p:txBody>
-          <a:bodyPr wrap="square" lIns="0" tIns="0" rIns="0" bIns="0" rtlCol="0" anchor="t"/>
-          <a:lstStyle/>
-          <a:p>
-            <a:pPr algn="l" indent="0" marL="0">
-              <a:spcAft>
-                <a:spcPts val="800"/>
-              </a:spcAft>
-              <a:buNone/>
-            </a:pPr>
-            <a:r>
-              <a:rPr lang="en-US" sz="4000" i="1" dirty="0">
-                <a:solidFill>
-                  <a:srgbClr val="111111"/>
-                </a:solidFill>
-                <a:latin typeface="Times New Roman" pitchFamily="34" charset="0"/>
-                <a:ea typeface="Times New Roman" pitchFamily="34" charset="-122"/>
-                <a:cs typeface="Times New Roman" pitchFamily="34" charset="-120"/>
-              </a:rPr>
-              <a:t>People respond to global warming with the following measures:</a:t>
-            </a:r>
-            <a:endParaRPr lang="en-US" sz="4000" dirty="0"/>
-          </a:p>
-          <a:p>
-            <a:pPr algn="l" indent="0" marL="0">
-              <a:spcAft>
-                <a:spcPts val="800"/>
-              </a:spcAft>
-              <a:buNone/>
-            </a:pPr>
-            <a:r>
-              <a:rPr lang="en-US" sz="4000" b="1" dirty="0">
-                <a:solidFill>
-                  <a:srgbClr val="111111"/>
-                </a:solidFill>
-                <a:latin typeface="Times New Roman" pitchFamily="34" charset="0"/>
-                <a:ea typeface="Times New Roman" pitchFamily="34" charset="-122"/>
-                <a:cs typeface="Times New Roman" pitchFamily="34" charset="-120"/>
-              </a:rPr>
-              <a:t>Mitigation: </a:t>
-            </a:r>
-            <a:pPr algn="l" indent="0" marL="0">
-              <a:spcAft>
-                <a:spcPts val="800"/>
-              </a:spcAft>
-              <a:buNone/>
-            </a:pPr>
-            <a:r>
-              <a:rPr lang="en-US" sz="4000" dirty="0">
-                <a:solidFill>
-                  <a:srgbClr val="111111"/>
-                </a:solidFill>
-                <a:latin typeface="Times New Roman" pitchFamily="34" charset="0"/>
-                <a:ea typeface="Times New Roman" pitchFamily="34" charset="-122"/>
-                <a:cs typeface="Times New Roman" pitchFamily="34" charset="-120"/>
-              </a:rPr>
-              <a:t>It is reducing the causes, for example by using solar energy and planting trees.</a:t>
-            </a:r>
-            <a:endParaRPr lang="en-US" sz="4000" dirty="0"/>
+              <a:t>Illustration: the greenhouse effect</a:t>
+            </a:r>
+            <a:endParaRPr lang="en-US" sz="1600" dirty="0"/>
           </a:p>
         </p:txBody>
       </p:sp>
@@ -13676,7 +14311,7 @@
         <p:spPr>
           <a:xfrm>
             <a:off x="0" y="658368"/>
-            <a:ext cx="5120640" cy="5833872"/>
+            <a:ext cx="2468880" cy="5833872"/>
           </a:xfrm>
           <a:prstGeom prst="rect">
             <a:avLst/>
@@ -13691,8 +14326,8 @@
         </p:nvSpPr>
         <p:spPr>
           <a:xfrm>
-            <a:off x="5349240" y="1005840"/>
-            <a:ext cx="6522415" cy="731520"/>
+            <a:off x="2697480" y="1005840"/>
+            <a:ext cx="9174175" cy="731520"/>
           </a:xfrm>
           <a:prstGeom prst="rect">
             <a:avLst/>
@@ -13718,7 +14353,7 @@
                 <a:ea typeface="Times New Roman" pitchFamily="34" charset="-122"/>
                 <a:cs typeface="Times New Roman" pitchFamily="34" charset="-120"/>
               </a:rPr>
-              <a:t>4. Adaptation and Mitigation (continued)</a:t>
+              <a:t>2. Effects of Global Warming</a:t>
             </a:r>
             <a:endParaRPr lang="en-US" sz="3600" dirty="0"/>
           </a:p>
@@ -13732,8 +14367,8 @@
         </p:nvSpPr>
         <p:spPr>
           <a:xfrm>
-            <a:off x="5349240" y="1783080"/>
-            <a:ext cx="6522415" cy="4663440"/>
+            <a:off x="2697480" y="1783080"/>
+            <a:ext cx="9174175" cy="4663440"/>
           </a:xfrm>
           <a:prstGeom prst="rect">
             <a:avLst/>
@@ -13752,7 +14387,7 @@
               <a:buNone/>
             </a:pPr>
             <a:r>
-              <a:rPr lang="en-US" sz="4000" b="1" dirty="0">
+              <a:rPr lang="en-US" sz="4000" i="1" dirty="0">
                 <a:solidFill>
                   <a:srgbClr val="111111"/>
                 </a:solidFill>
@@ -13760,8 +14395,11 @@
                 <a:ea typeface="Times New Roman" pitchFamily="34" charset="-122"/>
                 <a:cs typeface="Times New Roman" pitchFamily="34" charset="-120"/>
               </a:rPr>
-              <a:t>Adaptation: </a:t>
-            </a:r>
+              <a:t>Global warming has the following effects:</a:t>
+            </a:r>
+            <a:endParaRPr lang="en-US" sz="4000" dirty="0"/>
+          </a:p>
+          <a:p>
             <a:pPr algn="l" indent="0" marL="0">
               <a:spcAft>
                 <a:spcPts val="800"/>
@@ -13769,7 +14407,7 @@
               <a:buNone/>
             </a:pPr>
             <a:r>
-              <a:rPr lang="en-US" sz="4000" dirty="0">
+              <a:rPr lang="en-US" sz="4000" b="1" dirty="0">
                 <a:solidFill>
                   <a:srgbClr val="111111"/>
                 </a:solidFill>
@@ -13777,7 +14415,61 @@
                 <a:ea typeface="Times New Roman" pitchFamily="34" charset="-122"/>
                 <a:cs typeface="Times New Roman" pitchFamily="34" charset="-120"/>
               </a:rPr>
-              <a:t>It is living with the changes, for example by using seeds that resist drought.</a:t>
+              <a:t>Extreme weather: </a:t>
+            </a:r>
+            <a:pPr algn="l" indent="0" marL="0">
+              <a:spcAft>
+                <a:spcPts val="800"/>
+              </a:spcAft>
+              <a:buNone/>
+            </a:pPr>
+            <a:r>
+              <a:rPr lang="en-US" sz="4000" dirty="0">
+                <a:solidFill>
+                  <a:srgbClr val="111111"/>
+                </a:solidFill>
+                <a:latin typeface="Times New Roman" pitchFamily="34" charset="0"/>
+                <a:ea typeface="Times New Roman" pitchFamily="34" charset="-122"/>
+                <a:cs typeface="Times New Roman" pitchFamily="34" charset="-120"/>
+              </a:rPr>
+              <a:t>Heat waves, droughts, storms and floods become more frequent.</a:t>
+            </a:r>
+            <a:endParaRPr lang="en-US" sz="4000" dirty="0"/>
+          </a:p>
+          <a:p>
+            <a:pPr algn="l" indent="0" marL="0">
+              <a:spcAft>
+                <a:spcPts val="800"/>
+              </a:spcAft>
+              <a:buNone/>
+            </a:pPr>
+            <a:r>
+              <a:rPr lang="en-US" sz="4000" b="1" dirty="0">
+                <a:solidFill>
+                  <a:srgbClr val="111111"/>
+                </a:solidFill>
+                <a:latin typeface="Times New Roman" pitchFamily="34" charset="0"/>
+                <a:ea typeface="Times New Roman" pitchFamily="34" charset="-122"/>
+                <a:cs typeface="Times New Roman" pitchFamily="34" charset="-120"/>
+              </a:rPr>
+              <a:t>Sea-level rise: </a:t>
+            </a:r>
+            <a:pPr algn="l" indent="0" marL="0">
+              <a:spcAft>
+                <a:spcPts val="800"/>
+              </a:spcAft>
+              <a:buNone/>
+            </a:pPr>
+            <a:r>
+              <a:rPr lang="en-US" sz="4000" dirty="0">
+                <a:solidFill>
+                  <a:srgbClr val="111111"/>
+                </a:solidFill>
+                <a:latin typeface="Times New Roman" pitchFamily="34" charset="0"/>
+                <a:ea typeface="Times New Roman" pitchFamily="34" charset="-122"/>
+                <a:cs typeface="Times New Roman" pitchFamily="34" charset="-120"/>
+              </a:rPr>
+              <a:t>Melting ice and warmer water raise the sea level and threaten Douala and Limbe.</a:t>
             </a:r>
             <a:endParaRPr lang="en-US" sz="4000" dirty="0"/>
           </a:p>
@@ -13889,7 +14581,7 @@
                 <a:ea typeface="Calibri" pitchFamily="34" charset="-122"/>
                 <a:cs typeface="Calibri" pitchFamily="34" charset="-120"/>
               </a:rPr>
-              <a:t>FORMATIVE EVALUATION</a:t>
+              <a:t>BOARD SUMMARY</a:t>
             </a:r>
             <a:endParaRPr lang="en-US" sz="1400" dirty="0"/>
           </a:p>
@@ -13912,7 +14604,7 @@
         <p:spPr>
           <a:xfrm>
             <a:off x="0" y="658368"/>
-            <a:ext cx="5120640" cy="5833872"/>
+            <a:ext cx="2468880" cy="5833872"/>
           </a:xfrm>
           <a:prstGeom prst="rect">
             <a:avLst/>
@@ -13927,8 +14619,8 @@
         </p:nvSpPr>
         <p:spPr>
           <a:xfrm>
-            <a:off x="5349240" y="1005840"/>
-            <a:ext cx="6522415" cy="731520"/>
+            <a:off x="2697480" y="1005840"/>
+            <a:ext cx="9174175" cy="731520"/>
           </a:xfrm>
           <a:prstGeom prst="rect">
             <a:avLst/>
@@ -13954,7 +14646,7 @@
                 <a:ea typeface="Times New Roman" pitchFamily="34" charset="-122"/>
                 <a:cs typeface="Times New Roman" pitchFamily="34" charset="-120"/>
               </a:rPr>
-              <a:t>Evaluation 1</a:t>
+              <a:t>2. Effects of Global Warming (continued)</a:t>
             </a:r>
             <a:endParaRPr lang="en-US" sz="3600" dirty="0"/>
           </a:p>
@@ -13968,8 +14660,8 @@
         </p:nvSpPr>
         <p:spPr>
           <a:xfrm>
-            <a:off x="5349240" y="1783080"/>
-            <a:ext cx="6522415" cy="4663440"/>
+            <a:off x="2697480" y="1783080"/>
+            <a:ext cx="9174175" cy="4663440"/>
           </a:xfrm>
           <a:prstGeom prst="rect">
             <a:avLst/>
@@ -13988,7 +14680,7 @@
               <a:buNone/>
             </a:pPr>
             <a:r>
-              <a:rPr lang="en-US" sz="4000" dirty="0">
+              <a:rPr lang="en-US" sz="4000" b="1" dirty="0">
                 <a:solidFill>
                   <a:srgbClr val="111111"/>
                 </a:solidFill>
@@ -13996,7 +14688,98 @@
                 <a:ea typeface="Times New Roman" pitchFamily="34" charset="-122"/>
                 <a:cs typeface="Times New Roman" pitchFamily="34" charset="-120"/>
               </a:rPr>
-              <a:t>Give one human cause of global warming.</a:t>
+              <a:t>Farming and food: </a:t>
+            </a:r>
+            <a:pPr algn="l" indent="0" marL="0">
+              <a:spcAft>
+                <a:spcPts val="800"/>
+              </a:spcAft>
+              <a:buNone/>
+            </a:pPr>
+            <a:r>
+              <a:rPr lang="en-US" sz="4000" dirty="0">
+                <a:solidFill>
+                  <a:srgbClr val="111111"/>
+                </a:solidFill>
+                <a:latin typeface="Times New Roman" pitchFamily="34" charset="0"/>
+                <a:ea typeface="Times New Roman" pitchFamily="34" charset="-122"/>
+                <a:cs typeface="Times New Roman" pitchFamily="34" charset="-120"/>
+              </a:rPr>
+              <a:t>Irregular rains and heat reduce harvests.</a:t>
+            </a:r>
+            <a:endParaRPr lang="en-US" sz="4000" dirty="0"/>
+          </a:p>
+          <a:p>
+            <a:pPr algn="l" indent="0" marL="0">
+              <a:spcAft>
+                <a:spcPts val="800"/>
+              </a:spcAft>
+              <a:buNone/>
+            </a:pPr>
+            <a:r>
+              <a:rPr lang="en-US" sz="4000" b="1" dirty="0">
+                <a:solidFill>
+                  <a:srgbClr val="111111"/>
+                </a:solidFill>
+                <a:latin typeface="Times New Roman" pitchFamily="34" charset="0"/>
+                <a:ea typeface="Times New Roman" pitchFamily="34" charset="-122"/>
+                <a:cs typeface="Times New Roman" pitchFamily="34" charset="-120"/>
+              </a:rPr>
+              <a:t>Water and health: </a:t>
+            </a:r>
+            <a:pPr algn="l" indent="0" marL="0">
+              <a:spcAft>
+                <a:spcPts val="800"/>
+              </a:spcAft>
+              <a:buNone/>
+            </a:pPr>
+            <a:r>
+              <a:rPr lang="en-US" sz="4000" dirty="0">
+                <a:solidFill>
+                  <a:srgbClr val="111111"/>
+                </a:solidFill>
+                <a:latin typeface="Times New Roman" pitchFamily="34" charset="0"/>
+                <a:ea typeface="Times New Roman" pitchFamily="34" charset="-122"/>
+                <a:cs typeface="Times New Roman" pitchFamily="34" charset="-120"/>
+              </a:rPr>
+              <a:t>Lakes such as Lake Chad shrink, and diseases such as malaria spread.</a:t>
+            </a:r>
+            <a:endParaRPr lang="en-US" sz="4000" dirty="0"/>
+          </a:p>
+          <a:p>
+            <a:pPr algn="l" indent="0" marL="0">
+              <a:spcAft>
+                <a:spcPts val="800"/>
+              </a:spcAft>
+              <a:buNone/>
+            </a:pPr>
+            <a:r>
+              <a:rPr lang="en-US" sz="4000" b="1" dirty="0">
+                <a:solidFill>
+                  <a:srgbClr val="111111"/>
+                </a:solidFill>
+                <a:latin typeface="Times New Roman" pitchFamily="34" charset="0"/>
+                <a:ea typeface="Times New Roman" pitchFamily="34" charset="-122"/>
+                <a:cs typeface="Times New Roman" pitchFamily="34" charset="-120"/>
+              </a:rPr>
+              <a:t>Loss of plants and animals: </a:t>
+            </a:r>
+            <a:pPr algn="l" indent="0" marL="0">
+              <a:spcAft>
+                <a:spcPts val="800"/>
+              </a:spcAft>
+              <a:buNone/>
+            </a:pPr>
+            <a:r>
+              <a:rPr lang="en-US" sz="4000" dirty="0">
+                <a:solidFill>
+                  <a:srgbClr val="111111"/>
+                </a:solidFill>
+                <a:latin typeface="Times New Roman" pitchFamily="34" charset="0"/>
+                <a:ea typeface="Times New Roman" pitchFamily="34" charset="-122"/>
+                <a:cs typeface="Times New Roman" pitchFamily="34" charset="-120"/>
+              </a:rPr>
+              <a:t>Some species cannot adapt and disappear.</a:t>
             </a:r>
             <a:endParaRPr lang="en-US" sz="4000" dirty="0"/>
           </a:p>
@@ -14108,15 +14891,135 @@
                 <a:ea typeface="Calibri" pitchFamily="34" charset="-122"/>
                 <a:cs typeface="Calibri" pitchFamily="34" charset="-120"/>
               </a:rPr>
-              <a:t>FORMATIVE EVALUATION</a:t>
+              <a:t>BOARD SUMMARY</a:t>
             </a:r>
             <a:endParaRPr lang="en-US" sz="1400" dirty="0"/>
+          </a:p>
+        </p:txBody>
+      </p:sp>
+      <p:sp>
+        <p:nvSpPr>
+          <p:cNvPr id="3" name="Text 1"/>
+          <p:cNvSpPr/>
+          <p:nvPr/>
+        </p:nvSpPr>
+        <p:spPr>
+          <a:xfrm>
+            <a:off x="365760" y="1005840"/>
+            <a:ext cx="11460175" cy="731520"/>
+          </a:xfrm>
+          <a:prstGeom prst="rect">
+            <a:avLst/>
+          </a:prstGeom>
+          <a:noFill/>
+          <a:ln/>
+        </p:spPr>
+        <p:txBody>
+          <a:bodyPr wrap="square" lIns="0" tIns="0" rIns="0" bIns="0" rtlCol="0" anchor="ctr">
+            <a:normAutofit/>
+          </a:bodyPr>
+          <a:lstStyle/>
+          <a:p>
+            <a:pPr algn="ctr" indent="0" marL="0">
+              <a:buNone/>
+            </a:pPr>
+            <a:r>
+              <a:rPr lang="en-US" sz="3600" b="1" dirty="0">
+                <a:solidFill>
+                  <a:srgbClr val="990011"/>
+                </a:solidFill>
+                <a:latin typeface="Times New Roman" pitchFamily="34" charset="0"/>
+                <a:ea typeface="Times New Roman" pitchFamily="34" charset="-122"/>
+                <a:cs typeface="Times New Roman" pitchFamily="34" charset="-120"/>
+              </a:rPr>
+              <a:t>3. Adaptation and Mitigation</a:t>
+            </a:r>
+            <a:endParaRPr lang="en-US" sz="3600" dirty="0"/>
+          </a:p>
+        </p:txBody>
+      </p:sp>
+      <p:sp>
+        <p:nvSpPr>
+          <p:cNvPr id="4" name="Text 2"/>
+          <p:cNvSpPr/>
+          <p:nvPr/>
+        </p:nvSpPr>
+        <p:spPr>
+          <a:xfrm>
+            <a:off x="365760" y="1783080"/>
+            <a:ext cx="4846320" cy="4617720"/>
+          </a:xfrm>
+          <a:prstGeom prst="rect">
+            <a:avLst/>
+          </a:prstGeom>
+          <a:noFill/>
+          <a:ln/>
+        </p:spPr>
+        <p:txBody>
+          <a:bodyPr wrap="square" lIns="0" tIns="0" rIns="0" bIns="0" rtlCol="0" anchor="t"/>
+          <a:lstStyle/>
+          <a:p>
+            <a:pPr algn="l" indent="0" marL="0">
+              <a:spcAft>
+                <a:spcPts val="800"/>
+              </a:spcAft>
+              <a:buNone/>
+            </a:pPr>
+            <a:r>
+              <a:rPr lang="en-US" sz="3600" i="1" dirty="0">
+                <a:solidFill>
+                  <a:srgbClr val="111111"/>
+                </a:solidFill>
+                <a:latin typeface="Times New Roman" pitchFamily="34" charset="0"/>
+                <a:ea typeface="Times New Roman" pitchFamily="34" charset="-122"/>
+                <a:cs typeface="Times New Roman" pitchFamily="34" charset="-120"/>
+              </a:rPr>
+              <a:t>People respond to global warming with the following measures:</a:t>
+            </a:r>
+            <a:endParaRPr lang="en-US" sz="3600" dirty="0"/>
+          </a:p>
+          <a:p>
+            <a:pPr algn="l" indent="0" marL="0">
+              <a:spcAft>
+                <a:spcPts val="800"/>
+              </a:spcAft>
+              <a:buNone/>
+            </a:pPr>
+            <a:r>
+              <a:rPr lang="en-US" sz="3600" b="1" dirty="0">
+                <a:solidFill>
+                  <a:srgbClr val="111111"/>
+                </a:solidFill>
+                <a:latin typeface="Times New Roman" pitchFamily="34" charset="0"/>
+                <a:ea typeface="Times New Roman" pitchFamily="34" charset="-122"/>
+                <a:cs typeface="Times New Roman" pitchFamily="34" charset="-120"/>
+              </a:rPr>
+              <a:t>Clean energy (mitigation): </a:t>
+            </a:r>
+            <a:pPr algn="l" indent="0" marL="0">
+              <a:spcAft>
+                <a:spcPts val="800"/>
+              </a:spcAft>
+              <a:buNone/>
+            </a:pPr>
+            <a:r>
+              <a:rPr lang="en-US" sz="3600" dirty="0">
+                <a:solidFill>
+                  <a:srgbClr val="111111"/>
+                </a:solidFill>
+                <a:latin typeface="Times New Roman" pitchFamily="34" charset="0"/>
+                <a:ea typeface="Times New Roman" pitchFamily="34" charset="-122"/>
+                <a:cs typeface="Times New Roman" pitchFamily="34" charset="-120"/>
+              </a:rPr>
+              <a:t>Solar, wind and hydro-electric power reduce carbon dioxide.</a:t>
+            </a:r>
+            <a:endParaRPr lang="en-US" sz="3600" dirty="0"/>
           </a:p>
         </p:txBody>
       </p:sp>
       <p:pic>
         <p:nvPicPr>
-          <p:cNvPr id="3" name="Image 0" descr="/home/claude/f4/img/minesec_sheet.png">    </p:cNvPr>
+          <p:cNvPr id="5" name="Image 0" descr="/home/claude/f4/img/v2/f4_solar.jpg">    </p:cNvPr>
           <p:cNvPicPr>
             <a:picLocks noChangeAspect="1"/>
           </p:cNvPicPr>
@@ -14130,8 +15033,8 @@
         </p:blipFill>
         <p:spPr>
           <a:xfrm>
-            <a:off x="0" y="658368"/>
-            <a:ext cx="5120640" cy="5833872"/>
+            <a:off x="5349240" y="2071212"/>
+            <a:ext cx="6659575" cy="3693983"/>
           </a:xfrm>
           <a:prstGeom prst="rect">
             <a:avLst/>
@@ -14140,14 +15043,14 @@
       </p:pic>
       <p:sp>
         <p:nvSpPr>
-          <p:cNvPr id="4" name="Text 1"/>
+          <p:cNvPr id="6" name="Text 3"/>
           <p:cNvSpPr/>
           <p:nvPr/>
         </p:nvSpPr>
         <p:spPr>
           <a:xfrm>
-            <a:off x="5349240" y="1005840"/>
-            <a:ext cx="6522415" cy="731520"/>
+            <a:off x="5349240" y="6089904"/>
+            <a:ext cx="6659575" cy="347472"/>
           </a:xfrm>
           <a:prstGeom prst="rect">
             <a:avLst/>
@@ -14156,68 +15059,24 @@
           <a:ln/>
         </p:spPr>
         <p:txBody>
-          <a:bodyPr wrap="square" lIns="0" tIns="0" rIns="0" bIns="0" rtlCol="0" anchor="ctr">
-            <a:normAutofit/>
-          </a:bodyPr>
+          <a:bodyPr wrap="square" lIns="0" tIns="0" rIns="0" bIns="0" rtlCol="0" anchor="ctr"/>
           <a:lstStyle/>
           <a:p>
             <a:pPr algn="ctr" indent="0" marL="0">
               <a:buNone/>
             </a:pPr>
             <a:r>
-              <a:rPr lang="en-US" sz="3600" b="1" dirty="0">
-                <a:solidFill>
-                  <a:srgbClr val="990011"/>
+              <a:rPr lang="en-US" sz="1600" i="1" dirty="0">
+                <a:solidFill>
+                  <a:srgbClr val="555555"/>
                 </a:solidFill>
                 <a:latin typeface="Times New Roman" pitchFamily="34" charset="0"/>
                 <a:ea typeface="Times New Roman" pitchFamily="34" charset="-122"/>
                 <a:cs typeface="Times New Roman" pitchFamily="34" charset="-120"/>
               </a:rPr>
-              <a:t>Expected Answer</a:t>
-            </a:r>
-            <a:endParaRPr lang="en-US" sz="3600" dirty="0"/>
-          </a:p>
-        </p:txBody>
-      </p:sp>
-      <p:sp>
-        <p:nvSpPr>
-          <p:cNvPr id="5" name="Text 2"/>
-          <p:cNvSpPr/>
-          <p:nvPr/>
-        </p:nvSpPr>
-        <p:spPr>
-          <a:xfrm>
-            <a:off x="5349240" y="1783080"/>
-            <a:ext cx="6522415" cy="4663440"/>
-          </a:xfrm>
-          <a:prstGeom prst="rect">
-            <a:avLst/>
-          </a:prstGeom>
-          <a:noFill/>
-          <a:ln/>
-        </p:spPr>
-        <p:txBody>
-          <a:bodyPr wrap="square" lIns="0" tIns="0" rIns="0" bIns="0" rtlCol="0" anchor="t"/>
-          <a:lstStyle/>
-          <a:p>
-            <a:pPr algn="l" indent="0" marL="0">
-              <a:spcAft>
-                <a:spcPts val="800"/>
-              </a:spcAft>
-              <a:buNone/>
-            </a:pPr>
-            <a:r>
-              <a:rPr lang="en-US" sz="4000" dirty="0">
-                <a:solidFill>
-                  <a:srgbClr val="111111"/>
-                </a:solidFill>
-                <a:latin typeface="Times New Roman" pitchFamily="34" charset="0"/>
-                <a:ea typeface="Times New Roman" pitchFamily="34" charset="-122"/>
-                <a:cs typeface="Times New Roman" pitchFamily="34" charset="-120"/>
-              </a:rPr>
-              <a:t>Burning petrol and diesel (or deforestation).</a:t>
-            </a:r>
-            <a:endParaRPr lang="en-US" sz="4000" dirty="0"/>
+              <a:t>Illustration: solar panels</a:t>
+            </a:r>
+            <a:endParaRPr lang="en-US" sz="1600" dirty="0"/>
           </a:p>
         </p:txBody>
       </p:sp>
@@ -14327,7 +15186,7 @@
                 <a:ea typeface="Calibri" pitchFamily="34" charset="-122"/>
                 <a:cs typeface="Calibri" pitchFamily="34" charset="-120"/>
               </a:rPr>
-              <a:t>FORMATIVE EVALUATION</a:t>
+              <a:t>BOARD SUMMARY</a:t>
             </a:r>
             <a:endParaRPr lang="en-US" sz="1400" dirty="0"/>
           </a:p>
@@ -14350,7 +15209,7 @@
         <p:spPr>
           <a:xfrm>
             <a:off x="0" y="658368"/>
-            <a:ext cx="5120640" cy="5833872"/>
+            <a:ext cx="3840480" cy="5833872"/>
           </a:xfrm>
           <a:prstGeom prst="rect">
             <a:avLst/>
@@ -14365,8 +15224,8 @@
         </p:nvSpPr>
         <p:spPr>
           <a:xfrm>
-            <a:off x="5349240" y="1005840"/>
-            <a:ext cx="6522415" cy="731520"/>
+            <a:off x="4069080" y="1005840"/>
+            <a:ext cx="7802575" cy="731520"/>
           </a:xfrm>
           <a:prstGeom prst="rect">
             <a:avLst/>
@@ -14392,7 +15251,7 @@
                 <a:ea typeface="Times New Roman" pitchFamily="34" charset="-122"/>
                 <a:cs typeface="Times New Roman" pitchFamily="34" charset="-120"/>
               </a:rPr>
-              <a:t>Evaluation 2</a:t>
+              <a:t>3. Adaptation and Mitigation</a:t>
             </a:r>
             <a:endParaRPr lang="en-US" sz="3600" dirty="0"/>
           </a:p>
@@ -14406,8 +15265,8 @@
         </p:nvSpPr>
         <p:spPr>
           <a:xfrm>
-            <a:off x="5349240" y="1783080"/>
-            <a:ext cx="6522415" cy="4663440"/>
+            <a:off x="4069080" y="1783080"/>
+            <a:ext cx="7802575" cy="4663440"/>
           </a:xfrm>
           <a:prstGeom prst="rect">
             <a:avLst/>
@@ -14426,7 +15285,7 @@
               <a:buNone/>
             </a:pPr>
             <a:r>
-              <a:rPr lang="en-US" sz="4000" dirty="0">
+              <a:rPr lang="en-US" sz="4000" b="1" dirty="0">
                 <a:solidFill>
                   <a:srgbClr val="111111"/>
                 </a:solidFill>
@@ -14434,7 +15293,61 @@
                 <a:ea typeface="Times New Roman" pitchFamily="34" charset="-122"/>
                 <a:cs typeface="Times New Roman" pitchFamily="34" charset="-120"/>
               </a:rPr>
-              <a:t>What is the difference between mitigation and adaptation?</a:t>
+              <a:t>Tree planting (mitigation): </a:t>
+            </a:r>
+            <a:pPr algn="l" indent="0" marL="0">
+              <a:spcAft>
+                <a:spcPts val="800"/>
+              </a:spcAft>
+              <a:buNone/>
+            </a:pPr>
+            <a:r>
+              <a:rPr lang="en-US" sz="4000" dirty="0">
+                <a:solidFill>
+                  <a:srgbClr val="111111"/>
+                </a:solidFill>
+                <a:latin typeface="Times New Roman" pitchFamily="34" charset="0"/>
+                <a:ea typeface="Times New Roman" pitchFamily="34" charset="-122"/>
+                <a:cs typeface="Times New Roman" pitchFamily="34" charset="-120"/>
+              </a:rPr>
+              <a:t>Trees absorb carbon dioxide, as in reforestation projects.</a:t>
+            </a:r>
+            <a:endParaRPr lang="en-US" sz="4000" dirty="0"/>
+          </a:p>
+          <a:p>
+            <a:pPr algn="l" indent="0" marL="0">
+              <a:spcAft>
+                <a:spcPts val="800"/>
+              </a:spcAft>
+              <a:buNone/>
+            </a:pPr>
+            <a:r>
+              <a:rPr lang="en-US" sz="4000" b="1" dirty="0">
+                <a:solidFill>
+                  <a:srgbClr val="111111"/>
+                </a:solidFill>
+                <a:latin typeface="Times New Roman" pitchFamily="34" charset="0"/>
+                <a:ea typeface="Times New Roman" pitchFamily="34" charset="-122"/>
+                <a:cs typeface="Times New Roman" pitchFamily="34" charset="-120"/>
+              </a:rPr>
+              <a:t>Saving energy (mitigation): </a:t>
+            </a:r>
+            <a:pPr algn="l" indent="0" marL="0">
+              <a:spcAft>
+                <a:spcPts val="800"/>
+              </a:spcAft>
+              <a:buNone/>
+            </a:pPr>
+            <a:r>
+              <a:rPr lang="en-US" sz="4000" dirty="0">
+                <a:solidFill>
+                  <a:srgbClr val="111111"/>
+                </a:solidFill>
+                <a:latin typeface="Times New Roman" pitchFamily="34" charset="0"/>
+                <a:ea typeface="Times New Roman" pitchFamily="34" charset="-122"/>
+                <a:cs typeface="Times New Roman" pitchFamily="34" charset="-120"/>
+              </a:rPr>
+              <a:t>Improved stoves, public transport and less burning of waste reduce emissions.</a:t>
             </a:r>
             <a:endParaRPr lang="en-US" sz="4000" dirty="0"/>
           </a:p>
@@ -14785,7 +15698,7 @@
                 <a:ea typeface="Calibri" pitchFamily="34" charset="-122"/>
                 <a:cs typeface="Calibri" pitchFamily="34" charset="-120"/>
               </a:rPr>
-              <a:t>FORMATIVE EVALUATION</a:t>
+              <a:t>BOARD SUMMARY</a:t>
             </a:r>
             <a:endParaRPr lang="en-US" sz="1400" dirty="0"/>
           </a:p>
@@ -14808,7 +15721,7 @@
         <p:spPr>
           <a:xfrm>
             <a:off x="0" y="658368"/>
-            <a:ext cx="5120640" cy="5833872"/>
+            <a:ext cx="2468880" cy="5833872"/>
           </a:xfrm>
           <a:prstGeom prst="rect">
             <a:avLst/>
@@ -14823,8 +15736,8 @@
         </p:nvSpPr>
         <p:spPr>
           <a:xfrm>
-            <a:off x="5349240" y="1005840"/>
-            <a:ext cx="6522415" cy="731520"/>
+            <a:off x="2697480" y="1005840"/>
+            <a:ext cx="9174175" cy="731520"/>
           </a:xfrm>
           <a:prstGeom prst="rect">
             <a:avLst/>
@@ -14850,7 +15763,7 @@
                 <a:ea typeface="Times New Roman" pitchFamily="34" charset="-122"/>
                 <a:cs typeface="Times New Roman" pitchFamily="34" charset="-120"/>
               </a:rPr>
-              <a:t>Expected Answer</a:t>
+              <a:t>3. Adaptation and Mitigation (continued)</a:t>
             </a:r>
             <a:endParaRPr lang="en-US" sz="3600" dirty="0"/>
           </a:p>
@@ -14864,8 +15777,8 @@
         </p:nvSpPr>
         <p:spPr>
           <a:xfrm>
-            <a:off x="5349240" y="1783080"/>
-            <a:ext cx="6522415" cy="4663440"/>
+            <a:off x="2697480" y="1783080"/>
+            <a:ext cx="9174175" cy="4663440"/>
           </a:xfrm>
           <a:prstGeom prst="rect">
             <a:avLst/>
@@ -14884,7 +15797,7 @@
               <a:buNone/>
             </a:pPr>
             <a:r>
-              <a:rPr lang="en-US" sz="4000" dirty="0">
+              <a:rPr lang="en-US" sz="4000" b="1" dirty="0">
                 <a:solidFill>
                   <a:srgbClr val="111111"/>
                 </a:solidFill>
@@ -14892,7 +15805,61 @@
                 <a:ea typeface="Times New Roman" pitchFamily="34" charset="-122"/>
                 <a:cs typeface="Times New Roman" pitchFamily="34" charset="-120"/>
               </a:rPr>
-              <a:t>Mitigation reduces the causes; adaptation lives with the changes.</a:t>
+              <a:t>New farming methods (adaptation): </a:t>
+            </a:r>
+            <a:pPr algn="l" indent="0" marL="0">
+              <a:spcAft>
+                <a:spcPts val="800"/>
+              </a:spcAft>
+              <a:buNone/>
+            </a:pPr>
+            <a:r>
+              <a:rPr lang="en-US" sz="4000" dirty="0">
+                <a:solidFill>
+                  <a:srgbClr val="111111"/>
+                </a:solidFill>
+                <a:latin typeface="Times New Roman" pitchFamily="34" charset="0"/>
+                <a:ea typeface="Times New Roman" pitchFamily="34" charset="-122"/>
+                <a:cs typeface="Times New Roman" pitchFamily="34" charset="-120"/>
+              </a:rPr>
+              <a:t>Drought-resistant seeds, irrigation and changed planting dates help farmers.</a:t>
+            </a:r>
+            <a:endParaRPr lang="en-US" sz="4000" dirty="0"/>
+          </a:p>
+          <a:p>
+            <a:pPr algn="l" indent="0" marL="0">
+              <a:spcAft>
+                <a:spcPts val="800"/>
+              </a:spcAft>
+              <a:buNone/>
+            </a:pPr>
+            <a:r>
+              <a:rPr lang="en-US" sz="4000" b="1" dirty="0">
+                <a:solidFill>
+                  <a:srgbClr val="111111"/>
+                </a:solidFill>
+                <a:latin typeface="Times New Roman" pitchFamily="34" charset="0"/>
+                <a:ea typeface="Times New Roman" pitchFamily="34" charset="-122"/>
+                <a:cs typeface="Times New Roman" pitchFamily="34" charset="-120"/>
+              </a:rPr>
+              <a:t>Protection (adaptation): </a:t>
+            </a:r>
+            <a:pPr algn="l" indent="0" marL="0">
+              <a:spcAft>
+                <a:spcPts val="800"/>
+              </a:spcAft>
+              <a:buNone/>
+            </a:pPr>
+            <a:r>
+              <a:rPr lang="en-US" sz="4000" dirty="0">
+                <a:solidFill>
+                  <a:srgbClr val="111111"/>
+                </a:solidFill>
+                <a:latin typeface="Times New Roman" pitchFamily="34" charset="0"/>
+                <a:ea typeface="Times New Roman" pitchFamily="34" charset="-122"/>
+                <a:cs typeface="Times New Roman" pitchFamily="34" charset="-120"/>
+              </a:rPr>
+              <a:t>Dykes, early warnings and building away from coasts and rivers protect people.</a:t>
             </a:r>
             <a:endParaRPr lang="en-US" sz="4000" dirty="0"/>
           </a:p>
@@ -15004,7 +15971,7 @@
                 <a:ea typeface="Calibri" pitchFamily="34" charset="-122"/>
                 <a:cs typeface="Calibri" pitchFamily="34" charset="-120"/>
               </a:rPr>
-              <a:t>REMEDIATION</a:t>
+              <a:t>FORMATIVE EVALUATION</a:t>
             </a:r>
             <a:endParaRPr lang="en-US" sz="1400" dirty="0"/>
           </a:p>
@@ -15027,7 +15994,7 @@
         <p:spPr>
           <a:xfrm>
             <a:off x="0" y="658368"/>
-            <a:ext cx="2468880" cy="5833872"/>
+            <a:ext cx="5120640" cy="5833872"/>
           </a:xfrm>
           <a:prstGeom prst="rect">
             <a:avLst/>
@@ -15042,8 +16009,8 @@
         </p:nvSpPr>
         <p:spPr>
           <a:xfrm>
-            <a:off x="2697480" y="1005840"/>
-            <a:ext cx="9174175" cy="731520"/>
+            <a:off x="5349240" y="1005840"/>
+            <a:ext cx="6522415" cy="731520"/>
           </a:xfrm>
           <a:prstGeom prst="rect">
             <a:avLst/>
@@ -15069,7 +16036,7 @@
                 <a:ea typeface="Times New Roman" pitchFamily="34" charset="-122"/>
                 <a:cs typeface="Times New Roman" pitchFamily="34" charset="-120"/>
               </a:rPr>
-              <a:t>Remediation</a:t>
+              <a:t>Evaluation 1</a:t>
             </a:r>
             <a:endParaRPr lang="en-US" sz="3600" dirty="0"/>
           </a:p>
@@ -15083,8 +16050,8 @@
         </p:nvSpPr>
         <p:spPr>
           <a:xfrm>
-            <a:off x="2697480" y="1783080"/>
-            <a:ext cx="9174175" cy="4663440"/>
+            <a:off x="5349240" y="1783080"/>
+            <a:ext cx="6522415" cy="4663440"/>
           </a:xfrm>
           <a:prstGeom prst="rect">
             <a:avLst/>
@@ -15103,7 +16070,7 @@
               <a:buNone/>
             </a:pPr>
             <a:r>
-              <a:rPr lang="en-US" sz="4000" b="1" dirty="0">
+              <a:rPr lang="en-US" sz="4000" dirty="0">
                 <a:solidFill>
                   <a:srgbClr val="111111"/>
                 </a:solidFill>
@@ -15111,73 +16078,7 @@
                 <a:ea typeface="Times New Roman" pitchFamily="34" charset="-122"/>
                 <a:cs typeface="Times New Roman" pitchFamily="34" charset="-120"/>
               </a:rPr>
-              <a:t>Fill in the blanks:</a:t>
-            </a:r>
-            <a:endParaRPr lang="en-US" sz="4000" dirty="0"/>
-          </a:p>
-          <a:p>
-            <a:pPr algn="l" marL="342900" indent="-342900">
-              <a:spcAft>
-                <a:spcPts val="800"/>
-              </a:spcAft>
-              <a:buSzPct val="100000"/>
-              <a:buFont typeface="+mj-lt"/>
-              <a:buAutoNum type="arabicPeriod" startAt="1"/>
-            </a:pPr>
-            <a:r>
-              <a:rPr lang="en-US" sz="4000" dirty="0">
-                <a:solidFill>
-                  <a:srgbClr val="111111"/>
-                </a:solidFill>
-                <a:latin typeface="Times New Roman" pitchFamily="34" charset="0"/>
-                <a:ea typeface="Times New Roman" pitchFamily="34" charset="-122"/>
-                <a:cs typeface="Times New Roman" pitchFamily="34" charset="-120"/>
-              </a:rPr>
-              <a:t>The rise of the temperature of the Earth is global ______.</a:t>
-            </a:r>
-            <a:endParaRPr lang="en-US" sz="4000" dirty="0"/>
-          </a:p>
-          <a:p>
-            <a:pPr algn="l" marL="342900" indent="-342900">
-              <a:spcAft>
-                <a:spcPts val="800"/>
-              </a:spcAft>
-              <a:buSzPct val="100000"/>
-              <a:buFont typeface="+mj-lt"/>
-              <a:buAutoNum type="arabicPeriod" startAt="1"/>
-            </a:pPr>
-            <a:r>
-              <a:rPr lang="en-US" sz="4000" dirty="0">
-                <a:solidFill>
-                  <a:srgbClr val="111111"/>
-                </a:solidFill>
-                <a:latin typeface="Times New Roman" pitchFamily="34" charset="0"/>
-                <a:ea typeface="Times New Roman" pitchFamily="34" charset="-122"/>
-                <a:cs typeface="Times New Roman" pitchFamily="34" charset="-120"/>
-              </a:rPr>
-              <a:t>The main greenhouse gas is ______.</a:t>
-            </a:r>
-            <a:endParaRPr lang="en-US" sz="4000" dirty="0"/>
-          </a:p>
-          <a:p>
-            <a:pPr algn="l" marL="342900" indent="-342900">
-              <a:spcAft>
-                <a:spcPts val="800"/>
-              </a:spcAft>
-              <a:buSzPct val="100000"/>
-              <a:buFont typeface="+mj-lt"/>
-              <a:buAutoNum type="arabicPeriod" startAt="1"/>
-            </a:pPr>
-            <a:r>
-              <a:rPr lang="en-US" sz="4000" dirty="0">
-                <a:solidFill>
-                  <a:srgbClr val="111111"/>
-                </a:solidFill>
-                <a:latin typeface="Times New Roman" pitchFamily="34" charset="0"/>
-                <a:ea typeface="Times New Roman" pitchFamily="34" charset="-122"/>
-                <a:cs typeface="Times New Roman" pitchFamily="34" charset="-120"/>
-              </a:rPr>
-              <a:t>Planting trees is a form of ______.</a:t>
+              <a:t>Give one human cause of global warming.</a:t>
             </a:r>
             <a:endParaRPr lang="en-US" sz="4000" dirty="0"/>
           </a:p>
@@ -15289,7 +16190,7 @@
                 <a:ea typeface="Calibri" pitchFamily="34" charset="-122"/>
                 <a:cs typeface="Calibri" pitchFamily="34" charset="-120"/>
               </a:rPr>
-              <a:t>HOMEWORK</a:t>
+              <a:t>FORMATIVE EVALUATION</a:t>
             </a:r>
             <a:endParaRPr lang="en-US" sz="1400" dirty="0"/>
           </a:p>
@@ -15354,7 +16255,7 @@
                 <a:ea typeface="Times New Roman" pitchFamily="34" charset="-122"/>
                 <a:cs typeface="Times New Roman" pitchFamily="34" charset="-120"/>
               </a:rPr>
-              <a:t>Homework</a:t>
+              <a:t>Expected Answer</a:t>
             </a:r>
             <a:endParaRPr lang="en-US" sz="3600" dirty="0"/>
           </a:p>
@@ -15396,7 +16297,7 @@
                 <a:ea typeface="Times New Roman" pitchFamily="34" charset="-122"/>
                 <a:cs typeface="Times New Roman" pitchFamily="34" charset="-120"/>
               </a:rPr>
-              <a:t>Ask an adult in your family whether your area has ever been flooded or has suffered a very dry year. Write down when it happened and what damage it caused.</a:t>
+              <a:t>Burning petrol and diesel (or deforestation).</a:t>
             </a:r>
             <a:endParaRPr lang="en-US" sz="4000" dirty="0"/>
           </a:p>
@@ -15508,7 +16409,7 @@
                 <a:ea typeface="Calibri" pitchFamily="34" charset="-122"/>
                 <a:cs typeface="Calibri" pitchFamily="34" charset="-120"/>
               </a:rPr>
-              <a:t>NEXT LESSON</a:t>
+              <a:t>FORMATIVE EVALUATION</a:t>
             </a:r>
             <a:endParaRPr lang="en-US" sz="1400" dirty="0"/>
           </a:p>
@@ -15573,7 +16474,7 @@
                 <a:ea typeface="Times New Roman" pitchFamily="34" charset="-122"/>
                 <a:cs typeface="Times New Roman" pitchFamily="34" charset="-120"/>
               </a:rPr>
-              <a:t>Next Lesson</a:t>
+              <a:t>Evaluation 2</a:t>
             </a:r>
             <a:endParaRPr lang="en-US" sz="3600" dirty="0"/>
           </a:p>
@@ -15597,17 +16498,17 @@
           <a:ln/>
         </p:spPr>
         <p:txBody>
-          <a:bodyPr wrap="square" lIns="0" tIns="0" rIns="0" bIns="0" rtlCol="0" anchor="ctr"/>
-          <a:lstStyle/>
-          <a:p>
-            <a:pPr algn="ctr" indent="0" marL="0">
+          <a:bodyPr wrap="square" lIns="0" tIns="0" rIns="0" bIns="0" rtlCol="0" anchor="t"/>
+          <a:lstStyle/>
+          <a:p>
+            <a:pPr algn="l" indent="0" marL="0">
               <a:spcAft>
                 <a:spcPts val="800"/>
               </a:spcAft>
               <a:buNone/>
             </a:pPr>
             <a:r>
-              <a:rPr lang="en-US" sz="4000" b="1" dirty="0">
+              <a:rPr lang="en-US" sz="4000" dirty="0">
                 <a:solidFill>
                   <a:srgbClr val="111111"/>
                 </a:solidFill>
@@ -15615,27 +16516,7 @@
                 <a:ea typeface="Times New Roman" pitchFamily="34" charset="-122"/>
                 <a:cs typeface="Times New Roman" pitchFamily="34" charset="-120"/>
               </a:rPr>
-              <a:t>Our next lesson will be on:</a:t>
-            </a:r>
-            <a:endParaRPr lang="en-US" sz="4000" dirty="0"/>
-          </a:p>
-          <a:p>
-            <a:pPr algn="ctr" indent="0" marL="0">
-              <a:spcAft>
-                <a:spcPts val="800"/>
-              </a:spcAft>
-              <a:buNone/>
-            </a:pPr>
-            <a:r>
-              <a:rPr lang="en-US" sz="4000" b="1" dirty="0">
-                <a:solidFill>
-                  <a:srgbClr val="990011"/>
-                </a:solidFill>
-                <a:latin typeface="Times New Roman" pitchFamily="34" charset="0"/>
-                <a:ea typeface="Times New Roman" pitchFamily="34" charset="-122"/>
-                <a:cs typeface="Times New Roman" pitchFamily="34" charset="-120"/>
-              </a:rPr>
-              <a:t>Lesson 41: Floods, Droughts and Desertification</a:t>
+              <a:t>What is the difference between mitigation and adaptation?</a:t>
             </a:r>
             <a:endParaRPr lang="en-US" sz="4000" dirty="0"/>
           </a:p>
@@ -15747,6 +16628,968 @@
                 <a:ea typeface="Calibri" pitchFamily="34" charset="-122"/>
                 <a:cs typeface="Calibri" pitchFamily="34" charset="-120"/>
               </a:rPr>
+              <a:t>FORMATIVE EVALUATION</a:t>
+            </a:r>
+            <a:endParaRPr lang="en-US" sz="1400" dirty="0"/>
+          </a:p>
+        </p:txBody>
+      </p:sp>
+      <p:pic>
+        <p:nvPicPr>
+          <p:cNvPr id="3" name="Image 0" descr="/home/claude/f4/img/minesec_sheet.png">    </p:cNvPr>
+          <p:cNvPicPr>
+            <a:picLocks noChangeAspect="1"/>
+          </p:cNvPicPr>
+          <p:nvPr/>
+        </p:nvPicPr>
+        <p:blipFill>
+          <a:blip r:embed="rId1"/>
+          <a:stretch>
+            <a:fillRect/>
+          </a:stretch>
+        </p:blipFill>
+        <p:spPr>
+          <a:xfrm>
+            <a:off x="0" y="658368"/>
+            <a:ext cx="5120640" cy="5833872"/>
+          </a:xfrm>
+          <a:prstGeom prst="rect">
+            <a:avLst/>
+          </a:prstGeom>
+        </p:spPr>
+      </p:pic>
+      <p:sp>
+        <p:nvSpPr>
+          <p:cNvPr id="4" name="Text 1"/>
+          <p:cNvSpPr/>
+          <p:nvPr/>
+        </p:nvSpPr>
+        <p:spPr>
+          <a:xfrm>
+            <a:off x="5349240" y="1005840"/>
+            <a:ext cx="6522415" cy="731520"/>
+          </a:xfrm>
+          <a:prstGeom prst="rect">
+            <a:avLst/>
+          </a:prstGeom>
+          <a:noFill/>
+          <a:ln/>
+        </p:spPr>
+        <p:txBody>
+          <a:bodyPr wrap="square" lIns="0" tIns="0" rIns="0" bIns="0" rtlCol="0" anchor="ctr">
+            <a:normAutofit/>
+          </a:bodyPr>
+          <a:lstStyle/>
+          <a:p>
+            <a:pPr algn="ctr" indent="0" marL="0">
+              <a:buNone/>
+            </a:pPr>
+            <a:r>
+              <a:rPr lang="en-US" sz="3600" b="1" dirty="0">
+                <a:solidFill>
+                  <a:srgbClr val="990011"/>
+                </a:solidFill>
+                <a:latin typeface="Times New Roman" pitchFamily="34" charset="0"/>
+                <a:ea typeface="Times New Roman" pitchFamily="34" charset="-122"/>
+                <a:cs typeface="Times New Roman" pitchFamily="34" charset="-120"/>
+              </a:rPr>
+              <a:t>Expected Answer</a:t>
+            </a:r>
+            <a:endParaRPr lang="en-US" sz="3600" dirty="0"/>
+          </a:p>
+        </p:txBody>
+      </p:sp>
+      <p:sp>
+        <p:nvSpPr>
+          <p:cNvPr id="5" name="Text 2"/>
+          <p:cNvSpPr/>
+          <p:nvPr/>
+        </p:nvSpPr>
+        <p:spPr>
+          <a:xfrm>
+            <a:off x="5349240" y="1783080"/>
+            <a:ext cx="6522415" cy="4663440"/>
+          </a:xfrm>
+          <a:prstGeom prst="rect">
+            <a:avLst/>
+          </a:prstGeom>
+          <a:noFill/>
+          <a:ln/>
+        </p:spPr>
+        <p:txBody>
+          <a:bodyPr wrap="square" lIns="0" tIns="0" rIns="0" bIns="0" rtlCol="0" anchor="t"/>
+          <a:lstStyle/>
+          <a:p>
+            <a:pPr algn="l" indent="0" marL="0">
+              <a:spcAft>
+                <a:spcPts val="800"/>
+              </a:spcAft>
+              <a:buNone/>
+            </a:pPr>
+            <a:r>
+              <a:rPr lang="en-US" sz="4000" dirty="0">
+                <a:solidFill>
+                  <a:srgbClr val="111111"/>
+                </a:solidFill>
+                <a:latin typeface="Times New Roman" pitchFamily="34" charset="0"/>
+                <a:ea typeface="Times New Roman" pitchFamily="34" charset="-122"/>
+                <a:cs typeface="Times New Roman" pitchFamily="34" charset="-120"/>
+              </a:rPr>
+              <a:t>Mitigation reduces the causes; adaptation lives with the changes.</a:t>
+            </a:r>
+            <a:endParaRPr lang="en-US" sz="4000" dirty="0"/>
+          </a:p>
+        </p:txBody>
+      </p:sp>
+      <p:sp>
+        <p:nvSpPr>
+          <p:cNvPr id="25" name="Slide Number Placeholder 0"/>
+          <p:cNvSpPr>
+            <a:spLocks noGrp="1"/>
+          </p:cNvSpPr>
+          <p:nvPr>
+            <p:ph type="sldNum" sz="quarter" idx="4294967295"/>
+          </p:nvPr>
+        </p:nvSpPr>
+        <p:spPr>
+          <a:xfrm>
+            <a:off x="27432" y="91440"/>
+            <a:ext cx="585216" cy="475488"/>
+          </a:xfrm>
+          <a:prstGeom prst="rect">
+            <a:avLst/>
+          </a:prstGeom>
+          <a:extLst>
+            <a:ext uri="{C572A759-6A51-4108-AA02-DFA0A04FC94B}">
+              <ma14:wrappingTextBoxFlag xmlns:ma14="http://schemas.microsoft.com/office/mac/drawingml/2011/main" val="0"/>
+            </a:ext>
+          </a:extLst>
+        </p:spPr>
+        <p:txBody>
+          <a:bodyPr/>
+          <a:lstStyle>
+            <a:lvl1pPr>
+              <a:defRPr sz="2000">
+                <a:solidFill>
+                  <a:srgbClr val="FFFFFF"/>
+                </a:solidFill>
+                <a:latin typeface="Calibri"/>
+                <a:ea typeface="Calibri"/>
+                <a:cs typeface="Calibri"/>
+              </a:defRPr>
+            </a:lvl1pPr>
+          </a:lstStyle>
+          <a:p>
+            <a:pPr algn="ctr"/>
+            <a:fld id="{F7021451-1387-4CA6-816F-3879F97B5CBC}" type="slidenum">
+              <a:rPr b="1" lang="en-US"/>
+              <a:t>44</a:t>
+            </a:fld>
+            <a:endParaRPr lang="en-US"/>
+          </a:p>
+        </p:txBody>
+      </p:sp>
+    </p:spTree>
+  </p:cSld>
+  <p:clrMapOvr>
+    <a:masterClrMapping/>
+  </p:clrMapOvr>
+</p:sld>
+</file>
+
+<file path=ppt/slides/slide45.xml><?xml version="1.0" encoding="utf-8"?>
+<p:sld xmlns:a="http://schemas.openxmlformats.org/drawingml/2006/main" xmlns:r="http://schemas.openxmlformats.org/officeDocument/2006/relationships" xmlns:p="http://schemas.openxmlformats.org/presentationml/2006/main">
+  <p:cSld name="Slide 45">
+    <p:spTree>
+      <p:nvGrpSpPr>
+        <p:cNvPr id="1" name=""/>
+        <p:cNvGrpSpPr/>
+        <p:nvPr/>
+      </p:nvGrpSpPr>
+      <p:grpSpPr>
+        <a:xfrm>
+          <a:off x="0" y="0"/>
+          <a:ext cx="0" cy="0"/>
+          <a:chOff x="0" y="0"/>
+          <a:chExt cx="0" cy="0"/>
+        </a:xfrm>
+      </p:grpSpPr>
+      <p:sp>
+        <p:nvSpPr>
+          <p:cNvPr id="2" name="Text 0"/>
+          <p:cNvSpPr/>
+          <p:nvPr/>
+        </p:nvSpPr>
+        <p:spPr>
+          <a:xfrm>
+            <a:off x="457200" y="713232"/>
+            <a:ext cx="11368735" cy="274320"/>
+          </a:xfrm>
+          <a:prstGeom prst="rect">
+            <a:avLst/>
+          </a:prstGeom>
+          <a:noFill/>
+          <a:ln/>
+        </p:spPr>
+        <p:txBody>
+          <a:bodyPr wrap="square" lIns="0" tIns="0" rIns="0" bIns="0" rtlCol="0" anchor="ctr"/>
+          <a:lstStyle/>
+          <a:p>
+            <a:pPr algn="r" indent="0" marL="0">
+              <a:buNone/>
+            </a:pPr>
+            <a:r>
+              <a:rPr lang="en-US" sz="1400" b="1" dirty="0">
+                <a:solidFill>
+                  <a:srgbClr val="1C3F6E"/>
+                </a:solidFill>
+                <a:latin typeface="Calibri" pitchFamily="34" charset="0"/>
+                <a:ea typeface="Calibri" pitchFamily="34" charset="-122"/>
+                <a:cs typeface="Calibri" pitchFamily="34" charset="-120"/>
+              </a:rPr>
+              <a:t>REMEDIATION</a:t>
+            </a:r>
+            <a:endParaRPr lang="en-US" sz="1400" dirty="0"/>
+          </a:p>
+        </p:txBody>
+      </p:sp>
+      <p:pic>
+        <p:nvPicPr>
+          <p:cNvPr id="3" name="Image 0" descr="/home/claude/f4/img/minesec_sheet.png">    </p:cNvPr>
+          <p:cNvPicPr>
+            <a:picLocks noChangeAspect="1"/>
+          </p:cNvPicPr>
+          <p:nvPr/>
+        </p:nvPicPr>
+        <p:blipFill>
+          <a:blip r:embed="rId1"/>
+          <a:stretch>
+            <a:fillRect/>
+          </a:stretch>
+        </p:blipFill>
+        <p:spPr>
+          <a:xfrm>
+            <a:off x="0" y="658368"/>
+            <a:ext cx="2468880" cy="5833872"/>
+          </a:xfrm>
+          <a:prstGeom prst="rect">
+            <a:avLst/>
+          </a:prstGeom>
+        </p:spPr>
+      </p:pic>
+      <p:sp>
+        <p:nvSpPr>
+          <p:cNvPr id="4" name="Text 1"/>
+          <p:cNvSpPr/>
+          <p:nvPr/>
+        </p:nvSpPr>
+        <p:spPr>
+          <a:xfrm>
+            <a:off x="2697480" y="1005840"/>
+            <a:ext cx="9174175" cy="731520"/>
+          </a:xfrm>
+          <a:prstGeom prst="rect">
+            <a:avLst/>
+          </a:prstGeom>
+          <a:noFill/>
+          <a:ln/>
+        </p:spPr>
+        <p:txBody>
+          <a:bodyPr wrap="square" lIns="0" tIns="0" rIns="0" bIns="0" rtlCol="0" anchor="ctr">
+            <a:normAutofit/>
+          </a:bodyPr>
+          <a:lstStyle/>
+          <a:p>
+            <a:pPr algn="ctr" indent="0" marL="0">
+              <a:buNone/>
+            </a:pPr>
+            <a:r>
+              <a:rPr lang="en-US" sz="3600" b="1" dirty="0">
+                <a:solidFill>
+                  <a:srgbClr val="990011"/>
+                </a:solidFill>
+                <a:latin typeface="Times New Roman" pitchFamily="34" charset="0"/>
+                <a:ea typeface="Times New Roman" pitchFamily="34" charset="-122"/>
+                <a:cs typeface="Times New Roman" pitchFamily="34" charset="-120"/>
+              </a:rPr>
+              <a:t>Remediation</a:t>
+            </a:r>
+            <a:endParaRPr lang="en-US" sz="3600" dirty="0"/>
+          </a:p>
+        </p:txBody>
+      </p:sp>
+      <p:sp>
+        <p:nvSpPr>
+          <p:cNvPr id="5" name="Text 2"/>
+          <p:cNvSpPr/>
+          <p:nvPr/>
+        </p:nvSpPr>
+        <p:spPr>
+          <a:xfrm>
+            <a:off x="2697480" y="1783080"/>
+            <a:ext cx="9174175" cy="4663440"/>
+          </a:xfrm>
+          <a:prstGeom prst="rect">
+            <a:avLst/>
+          </a:prstGeom>
+          <a:noFill/>
+          <a:ln/>
+        </p:spPr>
+        <p:txBody>
+          <a:bodyPr wrap="square" lIns="0" tIns="0" rIns="0" bIns="0" rtlCol="0" anchor="t"/>
+          <a:lstStyle/>
+          <a:p>
+            <a:pPr algn="l" indent="0" marL="0">
+              <a:spcAft>
+                <a:spcPts val="800"/>
+              </a:spcAft>
+              <a:buNone/>
+            </a:pPr>
+            <a:r>
+              <a:rPr lang="en-US" sz="4000" b="1" dirty="0">
+                <a:solidFill>
+                  <a:srgbClr val="111111"/>
+                </a:solidFill>
+                <a:latin typeface="Times New Roman" pitchFamily="34" charset="0"/>
+                <a:ea typeface="Times New Roman" pitchFamily="34" charset="-122"/>
+                <a:cs typeface="Times New Roman" pitchFamily="34" charset="-120"/>
+              </a:rPr>
+              <a:t>Fill in the blanks:</a:t>
+            </a:r>
+            <a:endParaRPr lang="en-US" sz="4000" dirty="0"/>
+          </a:p>
+          <a:p>
+            <a:pPr algn="l" marL="342900" indent="-342900">
+              <a:spcAft>
+                <a:spcPts val="800"/>
+              </a:spcAft>
+              <a:buSzPct val="100000"/>
+              <a:buFont typeface="+mj-lt"/>
+              <a:buAutoNum type="arabicPeriod" startAt="1"/>
+            </a:pPr>
+            <a:r>
+              <a:rPr lang="en-US" sz="4000" dirty="0">
+                <a:solidFill>
+                  <a:srgbClr val="111111"/>
+                </a:solidFill>
+                <a:latin typeface="Times New Roman" pitchFamily="34" charset="0"/>
+                <a:ea typeface="Times New Roman" pitchFamily="34" charset="-122"/>
+                <a:cs typeface="Times New Roman" pitchFamily="34" charset="-120"/>
+              </a:rPr>
+              <a:t>The rise of the temperature of the Earth is global ______.</a:t>
+            </a:r>
+            <a:endParaRPr lang="en-US" sz="4000" dirty="0"/>
+          </a:p>
+          <a:p>
+            <a:pPr algn="l" marL="342900" indent="-342900">
+              <a:spcAft>
+                <a:spcPts val="800"/>
+              </a:spcAft>
+              <a:buSzPct val="100000"/>
+              <a:buFont typeface="+mj-lt"/>
+              <a:buAutoNum type="arabicPeriod" startAt="1"/>
+            </a:pPr>
+            <a:r>
+              <a:rPr lang="en-US" sz="4000" dirty="0">
+                <a:solidFill>
+                  <a:srgbClr val="111111"/>
+                </a:solidFill>
+                <a:latin typeface="Times New Roman" pitchFamily="34" charset="0"/>
+                <a:ea typeface="Times New Roman" pitchFamily="34" charset="-122"/>
+                <a:cs typeface="Times New Roman" pitchFamily="34" charset="-120"/>
+              </a:rPr>
+              <a:t>The main greenhouse gas is ______.</a:t>
+            </a:r>
+            <a:endParaRPr lang="en-US" sz="4000" dirty="0"/>
+          </a:p>
+          <a:p>
+            <a:pPr algn="l" marL="342900" indent="-342900">
+              <a:spcAft>
+                <a:spcPts val="800"/>
+              </a:spcAft>
+              <a:buSzPct val="100000"/>
+              <a:buFont typeface="+mj-lt"/>
+              <a:buAutoNum type="arabicPeriod" startAt="1"/>
+            </a:pPr>
+            <a:r>
+              <a:rPr lang="en-US" sz="4000" dirty="0">
+                <a:solidFill>
+                  <a:srgbClr val="111111"/>
+                </a:solidFill>
+                <a:latin typeface="Times New Roman" pitchFamily="34" charset="0"/>
+                <a:ea typeface="Times New Roman" pitchFamily="34" charset="-122"/>
+                <a:cs typeface="Times New Roman" pitchFamily="34" charset="-120"/>
+              </a:rPr>
+              <a:t>Planting trees is a form of ______.</a:t>
+            </a:r>
+            <a:endParaRPr lang="en-US" sz="4000" dirty="0"/>
+          </a:p>
+        </p:txBody>
+      </p:sp>
+      <p:sp>
+        <p:nvSpPr>
+          <p:cNvPr id="25" name="Slide Number Placeholder 0"/>
+          <p:cNvSpPr>
+            <a:spLocks noGrp="1"/>
+          </p:cNvSpPr>
+          <p:nvPr>
+            <p:ph type="sldNum" sz="quarter" idx="4294967295"/>
+          </p:nvPr>
+        </p:nvSpPr>
+        <p:spPr>
+          <a:xfrm>
+            <a:off x="27432" y="91440"/>
+            <a:ext cx="585216" cy="475488"/>
+          </a:xfrm>
+          <a:prstGeom prst="rect">
+            <a:avLst/>
+          </a:prstGeom>
+          <a:extLst>
+            <a:ext uri="{C572A759-6A51-4108-AA02-DFA0A04FC94B}">
+              <ma14:wrappingTextBoxFlag xmlns:ma14="http://schemas.microsoft.com/office/mac/drawingml/2011/main" val="0"/>
+            </a:ext>
+          </a:extLst>
+        </p:spPr>
+        <p:txBody>
+          <a:bodyPr/>
+          <a:lstStyle>
+            <a:lvl1pPr>
+              <a:defRPr sz="2000">
+                <a:solidFill>
+                  <a:srgbClr val="FFFFFF"/>
+                </a:solidFill>
+                <a:latin typeface="Calibri"/>
+                <a:ea typeface="Calibri"/>
+                <a:cs typeface="Calibri"/>
+              </a:defRPr>
+            </a:lvl1pPr>
+          </a:lstStyle>
+          <a:p>
+            <a:pPr algn="ctr"/>
+            <a:fld id="{F7021451-1387-4CA6-816F-3879F97B5CBC}" type="slidenum">
+              <a:rPr b="1" lang="en-US"/>
+              <a:t>45</a:t>
+            </a:fld>
+            <a:endParaRPr lang="en-US"/>
+          </a:p>
+        </p:txBody>
+      </p:sp>
+    </p:spTree>
+  </p:cSld>
+  <p:clrMapOvr>
+    <a:masterClrMapping/>
+  </p:clrMapOvr>
+</p:sld>
+</file>
+
+<file path=ppt/slides/slide46.xml><?xml version="1.0" encoding="utf-8"?>
+<p:sld xmlns:a="http://schemas.openxmlformats.org/drawingml/2006/main" xmlns:r="http://schemas.openxmlformats.org/officeDocument/2006/relationships" xmlns:p="http://schemas.openxmlformats.org/presentationml/2006/main">
+  <p:cSld name="Slide 46">
+    <p:spTree>
+      <p:nvGrpSpPr>
+        <p:cNvPr id="1" name=""/>
+        <p:cNvGrpSpPr/>
+        <p:nvPr/>
+      </p:nvGrpSpPr>
+      <p:grpSpPr>
+        <a:xfrm>
+          <a:off x="0" y="0"/>
+          <a:ext cx="0" cy="0"/>
+          <a:chOff x="0" y="0"/>
+          <a:chExt cx="0" cy="0"/>
+        </a:xfrm>
+      </p:grpSpPr>
+      <p:sp>
+        <p:nvSpPr>
+          <p:cNvPr id="2" name="Text 0"/>
+          <p:cNvSpPr/>
+          <p:nvPr/>
+        </p:nvSpPr>
+        <p:spPr>
+          <a:xfrm>
+            <a:off x="457200" y="713232"/>
+            <a:ext cx="11368735" cy="274320"/>
+          </a:xfrm>
+          <a:prstGeom prst="rect">
+            <a:avLst/>
+          </a:prstGeom>
+          <a:noFill/>
+          <a:ln/>
+        </p:spPr>
+        <p:txBody>
+          <a:bodyPr wrap="square" lIns="0" tIns="0" rIns="0" bIns="0" rtlCol="0" anchor="ctr"/>
+          <a:lstStyle/>
+          <a:p>
+            <a:pPr algn="r" indent="0" marL="0">
+              <a:buNone/>
+            </a:pPr>
+            <a:r>
+              <a:rPr lang="en-US" sz="1400" b="1" dirty="0">
+                <a:solidFill>
+                  <a:srgbClr val="1C3F6E"/>
+                </a:solidFill>
+                <a:latin typeface="Calibri" pitchFamily="34" charset="0"/>
+                <a:ea typeface="Calibri" pitchFamily="34" charset="-122"/>
+                <a:cs typeface="Calibri" pitchFamily="34" charset="-120"/>
+              </a:rPr>
+              <a:t>HOMEWORK</a:t>
+            </a:r>
+            <a:endParaRPr lang="en-US" sz="1400" dirty="0"/>
+          </a:p>
+        </p:txBody>
+      </p:sp>
+      <p:pic>
+        <p:nvPicPr>
+          <p:cNvPr id="3" name="Image 0" descr="/home/claude/f4/img/minesec_sheet.png">    </p:cNvPr>
+          <p:cNvPicPr>
+            <a:picLocks noChangeAspect="1"/>
+          </p:cNvPicPr>
+          <p:nvPr/>
+        </p:nvPicPr>
+        <p:blipFill>
+          <a:blip r:embed="rId1"/>
+          <a:stretch>
+            <a:fillRect/>
+          </a:stretch>
+        </p:blipFill>
+        <p:spPr>
+          <a:xfrm>
+            <a:off x="0" y="658368"/>
+            <a:ext cx="5120640" cy="5833872"/>
+          </a:xfrm>
+          <a:prstGeom prst="rect">
+            <a:avLst/>
+          </a:prstGeom>
+        </p:spPr>
+      </p:pic>
+      <p:sp>
+        <p:nvSpPr>
+          <p:cNvPr id="4" name="Text 1"/>
+          <p:cNvSpPr/>
+          <p:nvPr/>
+        </p:nvSpPr>
+        <p:spPr>
+          <a:xfrm>
+            <a:off x="5349240" y="1005840"/>
+            <a:ext cx="6522415" cy="731520"/>
+          </a:xfrm>
+          <a:prstGeom prst="rect">
+            <a:avLst/>
+          </a:prstGeom>
+          <a:noFill/>
+          <a:ln/>
+        </p:spPr>
+        <p:txBody>
+          <a:bodyPr wrap="square" lIns="0" tIns="0" rIns="0" bIns="0" rtlCol="0" anchor="ctr">
+            <a:normAutofit/>
+          </a:bodyPr>
+          <a:lstStyle/>
+          <a:p>
+            <a:pPr algn="ctr" indent="0" marL="0">
+              <a:buNone/>
+            </a:pPr>
+            <a:r>
+              <a:rPr lang="en-US" sz="3600" b="1" dirty="0">
+                <a:solidFill>
+                  <a:srgbClr val="990011"/>
+                </a:solidFill>
+                <a:latin typeface="Times New Roman" pitchFamily="34" charset="0"/>
+                <a:ea typeface="Times New Roman" pitchFamily="34" charset="-122"/>
+                <a:cs typeface="Times New Roman" pitchFamily="34" charset="-120"/>
+              </a:rPr>
+              <a:t>Homework</a:t>
+            </a:r>
+            <a:endParaRPr lang="en-US" sz="3600" dirty="0"/>
+          </a:p>
+        </p:txBody>
+      </p:sp>
+      <p:sp>
+        <p:nvSpPr>
+          <p:cNvPr id="5" name="Text 2"/>
+          <p:cNvSpPr/>
+          <p:nvPr/>
+        </p:nvSpPr>
+        <p:spPr>
+          <a:xfrm>
+            <a:off x="5349240" y="1783080"/>
+            <a:ext cx="6522415" cy="4663440"/>
+          </a:xfrm>
+          <a:prstGeom prst="rect">
+            <a:avLst/>
+          </a:prstGeom>
+          <a:noFill/>
+          <a:ln/>
+        </p:spPr>
+        <p:txBody>
+          <a:bodyPr wrap="square" lIns="0" tIns="0" rIns="0" bIns="0" rtlCol="0" anchor="t"/>
+          <a:lstStyle/>
+          <a:p>
+            <a:pPr algn="l" indent="0" marL="0">
+              <a:spcAft>
+                <a:spcPts val="800"/>
+              </a:spcAft>
+              <a:buNone/>
+            </a:pPr>
+            <a:r>
+              <a:rPr lang="en-US" sz="4000" dirty="0">
+                <a:solidFill>
+                  <a:srgbClr val="111111"/>
+                </a:solidFill>
+                <a:latin typeface="Times New Roman" pitchFamily="34" charset="0"/>
+                <a:ea typeface="Times New Roman" pitchFamily="34" charset="-122"/>
+                <a:cs typeface="Times New Roman" pitchFamily="34" charset="-120"/>
+              </a:rPr>
+              <a:t>Ask an adult in your family whether your area has ever been flooded or has suffered a very dry year. Write down when it happened and what damage it caused.</a:t>
+            </a:r>
+            <a:endParaRPr lang="en-US" sz="4000" dirty="0"/>
+          </a:p>
+        </p:txBody>
+      </p:sp>
+      <p:sp>
+        <p:nvSpPr>
+          <p:cNvPr id="25" name="Slide Number Placeholder 0"/>
+          <p:cNvSpPr>
+            <a:spLocks noGrp="1"/>
+          </p:cNvSpPr>
+          <p:nvPr>
+            <p:ph type="sldNum" sz="quarter" idx="4294967295"/>
+          </p:nvPr>
+        </p:nvSpPr>
+        <p:spPr>
+          <a:xfrm>
+            <a:off x="27432" y="91440"/>
+            <a:ext cx="585216" cy="475488"/>
+          </a:xfrm>
+          <a:prstGeom prst="rect">
+            <a:avLst/>
+          </a:prstGeom>
+          <a:extLst>
+            <a:ext uri="{C572A759-6A51-4108-AA02-DFA0A04FC94B}">
+              <ma14:wrappingTextBoxFlag xmlns:ma14="http://schemas.microsoft.com/office/mac/drawingml/2011/main" val="0"/>
+            </a:ext>
+          </a:extLst>
+        </p:spPr>
+        <p:txBody>
+          <a:bodyPr/>
+          <a:lstStyle>
+            <a:lvl1pPr>
+              <a:defRPr sz="2000">
+                <a:solidFill>
+                  <a:srgbClr val="FFFFFF"/>
+                </a:solidFill>
+                <a:latin typeface="Calibri"/>
+                <a:ea typeface="Calibri"/>
+                <a:cs typeface="Calibri"/>
+              </a:defRPr>
+            </a:lvl1pPr>
+          </a:lstStyle>
+          <a:p>
+            <a:pPr algn="ctr"/>
+            <a:fld id="{F7021451-1387-4CA6-816F-3879F97B5CBC}" type="slidenum">
+              <a:rPr b="1" lang="en-US"/>
+              <a:t>46</a:t>
+            </a:fld>
+            <a:endParaRPr lang="en-US"/>
+          </a:p>
+        </p:txBody>
+      </p:sp>
+    </p:spTree>
+  </p:cSld>
+  <p:clrMapOvr>
+    <a:masterClrMapping/>
+  </p:clrMapOvr>
+</p:sld>
+</file>
+
+<file path=ppt/slides/slide47.xml><?xml version="1.0" encoding="utf-8"?>
+<p:sld xmlns:a="http://schemas.openxmlformats.org/drawingml/2006/main" xmlns:r="http://schemas.openxmlformats.org/officeDocument/2006/relationships" xmlns:p="http://schemas.openxmlformats.org/presentationml/2006/main">
+  <p:cSld name="Slide 47">
+    <p:spTree>
+      <p:nvGrpSpPr>
+        <p:cNvPr id="1" name=""/>
+        <p:cNvGrpSpPr/>
+        <p:nvPr/>
+      </p:nvGrpSpPr>
+      <p:grpSpPr>
+        <a:xfrm>
+          <a:off x="0" y="0"/>
+          <a:ext cx="0" cy="0"/>
+          <a:chOff x="0" y="0"/>
+          <a:chExt cx="0" cy="0"/>
+        </a:xfrm>
+      </p:grpSpPr>
+      <p:sp>
+        <p:nvSpPr>
+          <p:cNvPr id="2" name="Text 0"/>
+          <p:cNvSpPr/>
+          <p:nvPr/>
+        </p:nvSpPr>
+        <p:spPr>
+          <a:xfrm>
+            <a:off x="457200" y="713232"/>
+            <a:ext cx="11368735" cy="274320"/>
+          </a:xfrm>
+          <a:prstGeom prst="rect">
+            <a:avLst/>
+          </a:prstGeom>
+          <a:noFill/>
+          <a:ln/>
+        </p:spPr>
+        <p:txBody>
+          <a:bodyPr wrap="square" lIns="0" tIns="0" rIns="0" bIns="0" rtlCol="0" anchor="ctr"/>
+          <a:lstStyle/>
+          <a:p>
+            <a:pPr algn="r" indent="0" marL="0">
+              <a:buNone/>
+            </a:pPr>
+            <a:r>
+              <a:rPr lang="en-US" sz="1400" b="1" dirty="0">
+                <a:solidFill>
+                  <a:srgbClr val="1C3F6E"/>
+                </a:solidFill>
+                <a:latin typeface="Calibri" pitchFamily="34" charset="0"/>
+                <a:ea typeface="Calibri" pitchFamily="34" charset="-122"/>
+                <a:cs typeface="Calibri" pitchFamily="34" charset="-120"/>
+              </a:rPr>
+              <a:t>NEXT LESSON</a:t>
+            </a:r>
+            <a:endParaRPr lang="en-US" sz="1400" dirty="0"/>
+          </a:p>
+        </p:txBody>
+      </p:sp>
+      <p:pic>
+        <p:nvPicPr>
+          <p:cNvPr id="3" name="Image 0" descr="/home/claude/f4/img/minesec_sheet.png">    </p:cNvPr>
+          <p:cNvPicPr>
+            <a:picLocks noChangeAspect="1"/>
+          </p:cNvPicPr>
+          <p:nvPr/>
+        </p:nvPicPr>
+        <p:blipFill>
+          <a:blip r:embed="rId1"/>
+          <a:stretch>
+            <a:fillRect/>
+          </a:stretch>
+        </p:blipFill>
+        <p:spPr>
+          <a:xfrm>
+            <a:off x="0" y="658368"/>
+            <a:ext cx="5120640" cy="5833872"/>
+          </a:xfrm>
+          <a:prstGeom prst="rect">
+            <a:avLst/>
+          </a:prstGeom>
+        </p:spPr>
+      </p:pic>
+      <p:sp>
+        <p:nvSpPr>
+          <p:cNvPr id="4" name="Text 1"/>
+          <p:cNvSpPr/>
+          <p:nvPr/>
+        </p:nvSpPr>
+        <p:spPr>
+          <a:xfrm>
+            <a:off x="5349240" y="1005840"/>
+            <a:ext cx="6522415" cy="731520"/>
+          </a:xfrm>
+          <a:prstGeom prst="rect">
+            <a:avLst/>
+          </a:prstGeom>
+          <a:noFill/>
+          <a:ln/>
+        </p:spPr>
+        <p:txBody>
+          <a:bodyPr wrap="square" lIns="0" tIns="0" rIns="0" bIns="0" rtlCol="0" anchor="ctr">
+            <a:normAutofit/>
+          </a:bodyPr>
+          <a:lstStyle/>
+          <a:p>
+            <a:pPr algn="ctr" indent="0" marL="0">
+              <a:buNone/>
+            </a:pPr>
+            <a:r>
+              <a:rPr lang="en-US" sz="3600" b="1" dirty="0">
+                <a:solidFill>
+                  <a:srgbClr val="990011"/>
+                </a:solidFill>
+                <a:latin typeface="Times New Roman" pitchFamily="34" charset="0"/>
+                <a:ea typeface="Times New Roman" pitchFamily="34" charset="-122"/>
+                <a:cs typeface="Times New Roman" pitchFamily="34" charset="-120"/>
+              </a:rPr>
+              <a:t>Next Lesson</a:t>
+            </a:r>
+            <a:endParaRPr lang="en-US" sz="3600" dirty="0"/>
+          </a:p>
+        </p:txBody>
+      </p:sp>
+      <p:sp>
+        <p:nvSpPr>
+          <p:cNvPr id="5" name="Text 2"/>
+          <p:cNvSpPr/>
+          <p:nvPr/>
+        </p:nvSpPr>
+        <p:spPr>
+          <a:xfrm>
+            <a:off x="5349240" y="1783080"/>
+            <a:ext cx="6522415" cy="4663440"/>
+          </a:xfrm>
+          <a:prstGeom prst="rect">
+            <a:avLst/>
+          </a:prstGeom>
+          <a:noFill/>
+          <a:ln/>
+        </p:spPr>
+        <p:txBody>
+          <a:bodyPr wrap="square" lIns="0" tIns="0" rIns="0" bIns="0" rtlCol="0" anchor="ctr"/>
+          <a:lstStyle/>
+          <a:p>
+            <a:pPr algn="ctr" indent="0" marL="0">
+              <a:spcAft>
+                <a:spcPts val="800"/>
+              </a:spcAft>
+              <a:buNone/>
+            </a:pPr>
+            <a:r>
+              <a:rPr lang="en-US" sz="4000" b="1" dirty="0">
+                <a:solidFill>
+                  <a:srgbClr val="111111"/>
+                </a:solidFill>
+                <a:latin typeface="Times New Roman" pitchFamily="34" charset="0"/>
+                <a:ea typeface="Times New Roman" pitchFamily="34" charset="-122"/>
+                <a:cs typeface="Times New Roman" pitchFamily="34" charset="-120"/>
+              </a:rPr>
+              <a:t>Our next lesson will be on:</a:t>
+            </a:r>
+            <a:endParaRPr lang="en-US" sz="4000" dirty="0"/>
+          </a:p>
+          <a:p>
+            <a:pPr algn="ctr" indent="0" marL="0">
+              <a:spcAft>
+                <a:spcPts val="800"/>
+              </a:spcAft>
+              <a:buNone/>
+            </a:pPr>
+            <a:r>
+              <a:rPr lang="en-US" sz="4000" b="1" dirty="0">
+                <a:solidFill>
+                  <a:srgbClr val="990011"/>
+                </a:solidFill>
+                <a:latin typeface="Times New Roman" pitchFamily="34" charset="0"/>
+                <a:ea typeface="Times New Roman" pitchFamily="34" charset="-122"/>
+                <a:cs typeface="Times New Roman" pitchFamily="34" charset="-120"/>
+              </a:rPr>
+              <a:t>Lesson 41: Floods, Droughts and Desertification</a:t>
+            </a:r>
+            <a:endParaRPr lang="en-US" sz="4000" dirty="0"/>
+          </a:p>
+        </p:txBody>
+      </p:sp>
+      <p:sp>
+        <p:nvSpPr>
+          <p:cNvPr id="25" name="Slide Number Placeholder 0"/>
+          <p:cNvSpPr>
+            <a:spLocks noGrp="1"/>
+          </p:cNvSpPr>
+          <p:nvPr>
+            <p:ph type="sldNum" sz="quarter" idx="4294967295"/>
+          </p:nvPr>
+        </p:nvSpPr>
+        <p:spPr>
+          <a:xfrm>
+            <a:off x="27432" y="91440"/>
+            <a:ext cx="585216" cy="475488"/>
+          </a:xfrm>
+          <a:prstGeom prst="rect">
+            <a:avLst/>
+          </a:prstGeom>
+          <a:extLst>
+            <a:ext uri="{C572A759-6A51-4108-AA02-DFA0A04FC94B}">
+              <ma14:wrappingTextBoxFlag xmlns:ma14="http://schemas.microsoft.com/office/mac/drawingml/2011/main" val="0"/>
+            </a:ext>
+          </a:extLst>
+        </p:spPr>
+        <p:txBody>
+          <a:bodyPr/>
+          <a:lstStyle>
+            <a:lvl1pPr>
+              <a:defRPr sz="2000">
+                <a:solidFill>
+                  <a:srgbClr val="FFFFFF"/>
+                </a:solidFill>
+                <a:latin typeface="Calibri"/>
+                <a:ea typeface="Calibri"/>
+                <a:cs typeface="Calibri"/>
+              </a:defRPr>
+            </a:lvl1pPr>
+          </a:lstStyle>
+          <a:p>
+            <a:pPr algn="ctr"/>
+            <a:fld id="{F7021451-1387-4CA6-816F-3879F97B5CBC}" type="slidenum">
+              <a:rPr b="1" lang="en-US"/>
+              <a:t>47</a:t>
+            </a:fld>
+            <a:endParaRPr lang="en-US"/>
+          </a:p>
+        </p:txBody>
+      </p:sp>
+    </p:spTree>
+  </p:cSld>
+  <p:clrMapOvr>
+    <a:masterClrMapping/>
+  </p:clrMapOvr>
+</p:sld>
+</file>
+
+<file path=ppt/slides/slide48.xml><?xml version="1.0" encoding="utf-8"?>
+<p:sld xmlns:a="http://schemas.openxmlformats.org/drawingml/2006/main" xmlns:r="http://schemas.openxmlformats.org/officeDocument/2006/relationships" xmlns:p="http://schemas.openxmlformats.org/presentationml/2006/main">
+  <p:cSld name="Slide 48">
+    <p:spTree>
+      <p:nvGrpSpPr>
+        <p:cNvPr id="1" name=""/>
+        <p:cNvGrpSpPr/>
+        <p:nvPr/>
+      </p:nvGrpSpPr>
+      <p:grpSpPr>
+        <a:xfrm>
+          <a:off x="0" y="0"/>
+          <a:ext cx="0" cy="0"/>
+          <a:chOff x="0" y="0"/>
+          <a:chExt cx="0" cy="0"/>
+        </a:xfrm>
+      </p:grpSpPr>
+      <p:sp>
+        <p:nvSpPr>
+          <p:cNvPr id="2" name="Text 0"/>
+          <p:cNvSpPr/>
+          <p:nvPr/>
+        </p:nvSpPr>
+        <p:spPr>
+          <a:xfrm>
+            <a:off x="457200" y="713232"/>
+            <a:ext cx="11368735" cy="274320"/>
+          </a:xfrm>
+          <a:prstGeom prst="rect">
+            <a:avLst/>
+          </a:prstGeom>
+          <a:noFill/>
+          <a:ln/>
+        </p:spPr>
+        <p:txBody>
+          <a:bodyPr wrap="square" lIns="0" tIns="0" rIns="0" bIns="0" rtlCol="0" anchor="ctr"/>
+          <a:lstStyle/>
+          <a:p>
+            <a:pPr algn="r" indent="0" marL="0">
+              <a:buNone/>
+            </a:pPr>
+            <a:r>
+              <a:rPr lang="en-US" sz="1400" b="1" dirty="0">
+                <a:solidFill>
+                  <a:srgbClr val="1C3F6E"/>
+                </a:solidFill>
+                <a:latin typeface="Calibri" pitchFamily="34" charset="0"/>
+                <a:ea typeface="Calibri" pitchFamily="34" charset="-122"/>
+                <a:cs typeface="Calibri" pitchFamily="34" charset="-120"/>
+              </a:rPr>
               <a:t>BILINGUAL GAME</a:t>
             </a:r>
             <a:endParaRPr lang="en-US" sz="1400" dirty="0"/>
@@ -15794,7 +17637,7 @@
       </p:sp>
       <p:graphicFrame>
         <p:nvGraphicFramePr>
-          <p:cNvPr id="45" name="Table 0"/>
+          <p:cNvPr id="49" name="Table 0"/>
           <p:cNvGraphicFramePr>
             <a:graphicFrameLocks noGrp="1"/>
           </p:cNvGraphicFramePr>
@@ -17106,7 +18949,7 @@
             <a:pPr algn="ctr"/>
             <a:fld id="{F7021451-1387-4CA6-816F-3879F97B5CBC}" type="slidenum">
               <a:rPr b="1" lang="en-US"/>
-              <a:t>44</a:t>
+              <a:t>48</a:t>
             </a:fld>
             <a:endParaRPr lang="en-US"/>
           </a:p>
@@ -17120,9 +18963,9 @@
 </p:sld>
 </file>
 
-<file path=ppt/slides/slide45.xml><?xml version="1.0" encoding="utf-8"?>
+<file path=ppt/slides/slide49.xml><?xml version="1.0" encoding="utf-8"?>
 <p:sld xmlns:a="http://schemas.openxmlformats.org/drawingml/2006/main" xmlns:r="http://schemas.openxmlformats.org/officeDocument/2006/relationships" xmlns:p="http://schemas.openxmlformats.org/presentationml/2006/main">
-  <p:cSld name="Slide 45">
+  <p:cSld name="Slide 49">
     <p:spTree>
       <p:nvGrpSpPr>
         <p:cNvPr id="1" name=""/>
@@ -17217,7 +19060,7 @@
       </p:sp>
       <p:graphicFrame>
         <p:nvGraphicFramePr>
-          <p:cNvPr id="46" name="Table 0"/>
+          <p:cNvPr id="50" name="Table 0"/>
           <p:cNvGraphicFramePr>
             <a:graphicFrameLocks noGrp="1"/>
           </p:cNvGraphicFramePr>
@@ -17839,7 +19682,7 @@
             <a:pPr algn="ctr"/>
             <a:fld id="{F7021451-1387-4CA6-816F-3879F97B5CBC}" type="slidenum">
               <a:rPr b="1" lang="en-US"/>
-              <a:t>45</a:t>
+              <a:t>49</a:t>
             </a:fld>
             <a:endParaRPr lang="en-US"/>
           </a:p>
@@ -17853,9 +19696,9 @@
 </p:sld>
 </file>
 
-<file path=ppt/slides/slide46.xml><?xml version="1.0" encoding="utf-8"?>
+<file path=ppt/slides/slide5.xml><?xml version="1.0" encoding="utf-8"?>
 <p:sld xmlns:a="http://schemas.openxmlformats.org/drawingml/2006/main" xmlns:r="http://schemas.openxmlformats.org/officeDocument/2006/relationships" xmlns:p="http://schemas.openxmlformats.org/presentationml/2006/main">
-  <p:cSld name="Slide 46">
+  <p:cSld name="Slide 5">
     <p:spTree>
       <p:nvGrpSpPr>
         <p:cNvPr id="1" name=""/>
@@ -17903,6 +19746,225 @@
                 <a:ea typeface="Calibri" pitchFamily="34" charset="-122"/>
                 <a:cs typeface="Calibri" pitchFamily="34" charset="-120"/>
               </a:rPr>
+              <a:t>HOMEWORK CORRECTION</a:t>
+            </a:r>
+            <a:endParaRPr lang="en-US" sz="1400" dirty="0"/>
+          </a:p>
+        </p:txBody>
+      </p:sp>
+      <p:pic>
+        <p:nvPicPr>
+          <p:cNvPr id="3" name="Image 0" descr="/home/claude/f4/img/minesec_sheet.png">    </p:cNvPr>
+          <p:cNvPicPr>
+            <a:picLocks noChangeAspect="1"/>
+          </p:cNvPicPr>
+          <p:nvPr/>
+        </p:nvPicPr>
+        <p:blipFill>
+          <a:blip r:embed="rId1"/>
+          <a:stretch>
+            <a:fillRect/>
+          </a:stretch>
+        </p:blipFill>
+        <p:spPr>
+          <a:xfrm>
+            <a:off x="0" y="658368"/>
+            <a:ext cx="5120640" cy="5833872"/>
+          </a:xfrm>
+          <a:prstGeom prst="rect">
+            <a:avLst/>
+          </a:prstGeom>
+        </p:spPr>
+      </p:pic>
+      <p:sp>
+        <p:nvSpPr>
+          <p:cNvPr id="4" name="Text 1"/>
+          <p:cNvSpPr/>
+          <p:nvPr/>
+        </p:nvSpPr>
+        <p:spPr>
+          <a:xfrm>
+            <a:off x="5349240" y="1005840"/>
+            <a:ext cx="6522415" cy="731520"/>
+          </a:xfrm>
+          <a:prstGeom prst="rect">
+            <a:avLst/>
+          </a:prstGeom>
+          <a:noFill/>
+          <a:ln/>
+        </p:spPr>
+        <p:txBody>
+          <a:bodyPr wrap="square" lIns="0" tIns="0" rIns="0" bIns="0" rtlCol="0" anchor="ctr">
+            <a:normAutofit/>
+          </a:bodyPr>
+          <a:lstStyle/>
+          <a:p>
+            <a:pPr algn="ctr" indent="0" marL="0">
+              <a:buNone/>
+            </a:pPr>
+            <a:r>
+              <a:rPr lang="en-US" sz="3600" b="1" dirty="0">
+                <a:solidFill>
+                  <a:srgbClr val="990011"/>
+                </a:solidFill>
+                <a:latin typeface="Times New Roman" pitchFamily="34" charset="0"/>
+                <a:ea typeface="Times New Roman" pitchFamily="34" charset="-122"/>
+                <a:cs typeface="Times New Roman" pitchFamily="34" charset="-120"/>
+              </a:rPr>
+              <a:t>Correction: Possible Answer</a:t>
+            </a:r>
+            <a:endParaRPr lang="en-US" sz="3600" dirty="0"/>
+          </a:p>
+        </p:txBody>
+      </p:sp>
+      <p:sp>
+        <p:nvSpPr>
+          <p:cNvPr id="5" name="Text 2"/>
+          <p:cNvSpPr/>
+          <p:nvPr/>
+        </p:nvSpPr>
+        <p:spPr>
+          <a:xfrm>
+            <a:off x="5349240" y="1783080"/>
+            <a:ext cx="6522415" cy="4663440"/>
+          </a:xfrm>
+          <a:prstGeom prst="rect">
+            <a:avLst/>
+          </a:prstGeom>
+          <a:noFill/>
+          <a:ln/>
+        </p:spPr>
+        <p:txBody>
+          <a:bodyPr wrap="square" lIns="0" tIns="0" rIns="0" bIns="0" rtlCol="0" anchor="t"/>
+          <a:lstStyle/>
+          <a:p>
+            <a:pPr algn="l" indent="0" marL="0">
+              <a:spcAft>
+                <a:spcPts val="800"/>
+              </a:spcAft>
+              <a:buNone/>
+            </a:pPr>
+            <a:r>
+              <a:rPr lang="en-US" sz="4000" dirty="0">
+                <a:solidFill>
+                  <a:srgbClr val="111111"/>
+                </a:solidFill>
+                <a:latin typeface="Times New Roman" pitchFamily="34" charset="0"/>
+                <a:ea typeface="Times New Roman" pitchFamily="34" charset="-122"/>
+                <a:cs typeface="Times New Roman" pitchFamily="34" charset="-120"/>
+              </a:rPr>
+              <a:t>Answers vary. Many elders say the dry season today is hotter and longer, and the rains are less regular than when they were young.</a:t>
+            </a:r>
+            <a:endParaRPr lang="en-US" sz="4000" dirty="0"/>
+          </a:p>
+        </p:txBody>
+      </p:sp>
+      <p:sp>
+        <p:nvSpPr>
+          <p:cNvPr id="25" name="Slide Number Placeholder 0"/>
+          <p:cNvSpPr>
+            <a:spLocks noGrp="1"/>
+          </p:cNvSpPr>
+          <p:nvPr>
+            <p:ph type="sldNum" sz="quarter" idx="4294967295"/>
+          </p:nvPr>
+        </p:nvSpPr>
+        <p:spPr>
+          <a:xfrm>
+            <a:off x="27432" y="91440"/>
+            <a:ext cx="585216" cy="475488"/>
+          </a:xfrm>
+          <a:prstGeom prst="rect">
+            <a:avLst/>
+          </a:prstGeom>
+          <a:extLst>
+            <a:ext uri="{C572A759-6A51-4108-AA02-DFA0A04FC94B}">
+              <ma14:wrappingTextBoxFlag xmlns:ma14="http://schemas.microsoft.com/office/mac/drawingml/2011/main" val="0"/>
+            </a:ext>
+          </a:extLst>
+        </p:spPr>
+        <p:txBody>
+          <a:bodyPr/>
+          <a:lstStyle>
+            <a:lvl1pPr>
+              <a:defRPr sz="2000">
+                <a:solidFill>
+                  <a:srgbClr val="FFFFFF"/>
+                </a:solidFill>
+                <a:latin typeface="Calibri"/>
+                <a:ea typeface="Calibri"/>
+                <a:cs typeface="Calibri"/>
+              </a:defRPr>
+            </a:lvl1pPr>
+          </a:lstStyle>
+          <a:p>
+            <a:pPr algn="ctr"/>
+            <a:fld id="{F7021451-1387-4CA6-816F-3879F97B5CBC}" type="slidenum">
+              <a:rPr b="1" lang="en-US"/>
+              <a:t>5</a:t>
+            </a:fld>
+            <a:endParaRPr lang="en-US"/>
+          </a:p>
+        </p:txBody>
+      </p:sp>
+    </p:spTree>
+  </p:cSld>
+  <p:clrMapOvr>
+    <a:masterClrMapping/>
+  </p:clrMapOvr>
+</p:sld>
+</file>
+
+<file path=ppt/slides/slide50.xml><?xml version="1.0" encoding="utf-8"?>
+<p:sld xmlns:a="http://schemas.openxmlformats.org/drawingml/2006/main" xmlns:r="http://schemas.openxmlformats.org/officeDocument/2006/relationships" xmlns:p="http://schemas.openxmlformats.org/presentationml/2006/main">
+  <p:cSld name="Slide 50">
+    <p:spTree>
+      <p:nvGrpSpPr>
+        <p:cNvPr id="1" name=""/>
+        <p:cNvGrpSpPr/>
+        <p:nvPr/>
+      </p:nvGrpSpPr>
+      <p:grpSpPr>
+        <a:xfrm>
+          <a:off x="0" y="0"/>
+          <a:ext cx="0" cy="0"/>
+          <a:chOff x="0" y="0"/>
+          <a:chExt cx="0" cy="0"/>
+        </a:xfrm>
+      </p:grpSpPr>
+      <p:sp>
+        <p:nvSpPr>
+          <p:cNvPr id="2" name="Text 0"/>
+          <p:cNvSpPr/>
+          <p:nvPr/>
+        </p:nvSpPr>
+        <p:spPr>
+          <a:xfrm>
+            <a:off x="457200" y="713232"/>
+            <a:ext cx="11368735" cy="274320"/>
+          </a:xfrm>
+          <a:prstGeom prst="rect">
+            <a:avLst/>
+          </a:prstGeom>
+          <a:noFill/>
+          <a:ln/>
+        </p:spPr>
+        <p:txBody>
+          <a:bodyPr wrap="square" lIns="0" tIns="0" rIns="0" bIns="0" rtlCol="0" anchor="ctr"/>
+          <a:lstStyle/>
+          <a:p>
+            <a:pPr algn="r" indent="0" marL="0">
+              <a:buNone/>
+            </a:pPr>
+            <a:r>
+              <a:rPr lang="en-US" sz="1400" b="1" dirty="0">
+                <a:solidFill>
+                  <a:srgbClr val="1C3F6E"/>
+                </a:solidFill>
+                <a:latin typeface="Calibri" pitchFamily="34" charset="0"/>
+                <a:ea typeface="Calibri" pitchFamily="34" charset="-122"/>
+                <a:cs typeface="Calibri" pitchFamily="34" charset="-120"/>
+              </a:rPr>
               <a:t>LOGBOOK</a:t>
             </a:r>
             <a:endParaRPr lang="en-US" sz="1400" dirty="0"/>
@@ -17950,7 +20012,7 @@
       </p:sp>
       <p:graphicFrame>
         <p:nvGraphicFramePr>
-          <p:cNvPr id="47" name="Table 0"/>
+          <p:cNvPr id="51" name="Table 0"/>
           <p:cNvGraphicFramePr>
             <a:graphicFrameLocks noGrp="1"/>
           </p:cNvGraphicFramePr>
@@ -18060,7 +20122,7 @@
                           <a:ea typeface="Calibri" pitchFamily="34" charset="-122"/>
                           <a:cs typeface="Calibri" pitchFamily="34" charset="-120"/>
                         </a:rPr>
-                        <a:t>Meaning of Global Warming; Causes of Global Warming; Effects of Global Warming; Adaptation and Mitigation.</a:t>
+                        <a:t>DEFINITIONS; Human Causes; Natural Causes; Effects of Global Warming; Adaptation and Mitigation.</a:t>
                       </a:r>
                       <a:endParaRPr lang="en-US" sz="1600" dirty="0">
                         <a:latin typeface="Calibri" charset="0"/>
@@ -18710,7 +20772,7 @@
             <a:pPr algn="ctr"/>
             <a:fld id="{F7021451-1387-4CA6-816F-3879F97B5CBC}" type="slidenum">
               <a:rPr b="1" lang="en-US"/>
-              <a:t>46</a:t>
+              <a:t>50</a:t>
             </a:fld>
             <a:endParaRPr lang="en-US"/>
           </a:p>
@@ -18724,9 +20786,9 @@
 </p:sld>
 </file>
 
-<file path=ppt/slides/slide47.xml><?xml version="1.0" encoding="utf-8"?>
+<file path=ppt/slides/slide51.xml><?xml version="1.0" encoding="utf-8"?>
 <p:sld xmlns:a="http://schemas.openxmlformats.org/drawingml/2006/main" xmlns:r="http://schemas.openxmlformats.org/officeDocument/2006/relationships" xmlns:p="http://schemas.openxmlformats.org/presentationml/2006/main">
-  <p:cSld name="Slide 47">
+  <p:cSld name="Slide 51">
     <p:spTree>
       <p:nvGrpSpPr>
         <p:cNvPr id="1" name=""/>
@@ -18924,7 +20986,7 @@
                 <a:ea typeface="Calibri" pitchFamily="34" charset="-122"/>
                 <a:cs typeface="Calibri" pitchFamily="34" charset="-120"/>
               </a:rPr>
-              <a:t>Without the projector (Activity 2): ask learners about the smoke of motorbikes and generators.</a:t>
+              <a:t>Without the projector (Activity 2): show smoke from a motorbike.</a:t>
             </a:r>
             <a:endParaRPr lang="en-US" sz="2000" dirty="0"/>
           </a:p>
@@ -18945,7 +21007,7 @@
                 <a:ea typeface="Calibri" pitchFamily="34" charset="-122"/>
                 <a:cs typeface="Calibri" pitchFamily="34" charset="-120"/>
               </a:rPr>
-              <a:t>Without the projector (Activity 3): ask learners who uses a solar lamp.</a:t>
+              <a:t>Without the projector (Activity 3): ask who has a solar lamp.</a:t>
             </a:r>
             <a:endParaRPr lang="en-US" sz="2000" dirty="0"/>
           </a:p>
@@ -18993,7 +21055,7 @@
             <a:pPr algn="ctr"/>
             <a:fld id="{F7021451-1387-4CA6-816F-3879F97B5CBC}" type="slidenum">
               <a:rPr b="1" lang="en-US"/>
-              <a:t>47</a:t>
+              <a:t>51</a:t>
             </a:fld>
             <a:endParaRPr lang="en-US"/>
           </a:p>
@@ -19007,9 +21069,9 @@
 </p:sld>
 </file>
 
-<file path=ppt/slides/slide48.xml><?xml version="1.0" encoding="utf-8"?>
+<file path=ppt/slides/slide52.xml><?xml version="1.0" encoding="utf-8"?>
 <p:sld xmlns:a="http://schemas.openxmlformats.org/drawingml/2006/main" xmlns:r="http://schemas.openxmlformats.org/officeDocument/2006/relationships" xmlns:p="http://schemas.openxmlformats.org/presentationml/2006/main">
-  <p:cSld name="Slide 48">
+  <p:cSld name="Slide 52">
     <p:spTree>
       <p:nvGrpSpPr>
         <p:cNvPr id="1" name=""/>
@@ -19339,226 +21401,7 @@
             <a:pPr algn="ctr"/>
             <a:fld id="{F7021451-1387-4CA6-816F-3879F97B5CBC}" type="slidenum">
               <a:rPr b="1" lang="en-US"/>
-              <a:t>48</a:t>
-            </a:fld>
-            <a:endParaRPr lang="en-US"/>
-          </a:p>
-        </p:txBody>
-      </p:sp>
-    </p:spTree>
-  </p:cSld>
-  <p:clrMapOvr>
-    <a:masterClrMapping/>
-  </p:clrMapOvr>
-</p:sld>
-</file>
-
-<file path=ppt/slides/slide5.xml><?xml version="1.0" encoding="utf-8"?>
-<p:sld xmlns:a="http://schemas.openxmlformats.org/drawingml/2006/main" xmlns:r="http://schemas.openxmlformats.org/officeDocument/2006/relationships" xmlns:p="http://schemas.openxmlformats.org/presentationml/2006/main">
-  <p:cSld name="Slide 5">
-    <p:spTree>
-      <p:nvGrpSpPr>
-        <p:cNvPr id="1" name=""/>
-        <p:cNvGrpSpPr/>
-        <p:nvPr/>
-      </p:nvGrpSpPr>
-      <p:grpSpPr>
-        <a:xfrm>
-          <a:off x="0" y="0"/>
-          <a:ext cx="0" cy="0"/>
-          <a:chOff x="0" y="0"/>
-          <a:chExt cx="0" cy="0"/>
-        </a:xfrm>
-      </p:grpSpPr>
-      <p:sp>
-        <p:nvSpPr>
-          <p:cNvPr id="2" name="Text 0"/>
-          <p:cNvSpPr/>
-          <p:nvPr/>
-        </p:nvSpPr>
-        <p:spPr>
-          <a:xfrm>
-            <a:off x="457200" y="713232"/>
-            <a:ext cx="11368735" cy="274320"/>
-          </a:xfrm>
-          <a:prstGeom prst="rect">
-            <a:avLst/>
-          </a:prstGeom>
-          <a:noFill/>
-          <a:ln/>
-        </p:spPr>
-        <p:txBody>
-          <a:bodyPr wrap="square" lIns="0" tIns="0" rIns="0" bIns="0" rtlCol="0" anchor="ctr"/>
-          <a:lstStyle/>
-          <a:p>
-            <a:pPr algn="r" indent="0" marL="0">
-              <a:buNone/>
-            </a:pPr>
-            <a:r>
-              <a:rPr lang="en-US" sz="1400" b="1" dirty="0">
-                <a:solidFill>
-                  <a:srgbClr val="1C3F6E"/>
-                </a:solidFill>
-                <a:latin typeface="Calibri" pitchFamily="34" charset="0"/>
-                <a:ea typeface="Calibri" pitchFamily="34" charset="-122"/>
-                <a:cs typeface="Calibri" pitchFamily="34" charset="-120"/>
-              </a:rPr>
-              <a:t>HOMEWORK CORRECTION</a:t>
-            </a:r>
-            <a:endParaRPr lang="en-US" sz="1400" dirty="0"/>
-          </a:p>
-        </p:txBody>
-      </p:sp>
-      <p:pic>
-        <p:nvPicPr>
-          <p:cNvPr id="3" name="Image 0" descr="/home/claude/f4/img/minesec_sheet.png">    </p:cNvPr>
-          <p:cNvPicPr>
-            <a:picLocks noChangeAspect="1"/>
-          </p:cNvPicPr>
-          <p:nvPr/>
-        </p:nvPicPr>
-        <p:blipFill>
-          <a:blip r:embed="rId1"/>
-          <a:stretch>
-            <a:fillRect/>
-          </a:stretch>
-        </p:blipFill>
-        <p:spPr>
-          <a:xfrm>
-            <a:off x="0" y="658368"/>
-            <a:ext cx="5120640" cy="5833872"/>
-          </a:xfrm>
-          <a:prstGeom prst="rect">
-            <a:avLst/>
-          </a:prstGeom>
-        </p:spPr>
-      </p:pic>
-      <p:sp>
-        <p:nvSpPr>
-          <p:cNvPr id="4" name="Text 1"/>
-          <p:cNvSpPr/>
-          <p:nvPr/>
-        </p:nvSpPr>
-        <p:spPr>
-          <a:xfrm>
-            <a:off x="5349240" y="1005840"/>
-            <a:ext cx="6522415" cy="731520"/>
-          </a:xfrm>
-          <a:prstGeom prst="rect">
-            <a:avLst/>
-          </a:prstGeom>
-          <a:noFill/>
-          <a:ln/>
-        </p:spPr>
-        <p:txBody>
-          <a:bodyPr wrap="square" lIns="0" tIns="0" rIns="0" bIns="0" rtlCol="0" anchor="ctr">
-            <a:normAutofit/>
-          </a:bodyPr>
-          <a:lstStyle/>
-          <a:p>
-            <a:pPr algn="ctr" indent="0" marL="0">
-              <a:buNone/>
-            </a:pPr>
-            <a:r>
-              <a:rPr lang="en-US" sz="3600" b="1" dirty="0">
-                <a:solidFill>
-                  <a:srgbClr val="990011"/>
-                </a:solidFill>
-                <a:latin typeface="Times New Roman" pitchFamily="34" charset="0"/>
-                <a:ea typeface="Times New Roman" pitchFamily="34" charset="-122"/>
-                <a:cs typeface="Times New Roman" pitchFamily="34" charset="-120"/>
-              </a:rPr>
-              <a:t>Correction: Possible Answer</a:t>
-            </a:r>
-            <a:endParaRPr lang="en-US" sz="3600" dirty="0"/>
-          </a:p>
-        </p:txBody>
-      </p:sp>
-      <p:sp>
-        <p:nvSpPr>
-          <p:cNvPr id="5" name="Text 2"/>
-          <p:cNvSpPr/>
-          <p:nvPr/>
-        </p:nvSpPr>
-        <p:spPr>
-          <a:xfrm>
-            <a:off x="5349240" y="1783080"/>
-            <a:ext cx="6522415" cy="4663440"/>
-          </a:xfrm>
-          <a:prstGeom prst="rect">
-            <a:avLst/>
-          </a:prstGeom>
-          <a:noFill/>
-          <a:ln/>
-        </p:spPr>
-        <p:txBody>
-          <a:bodyPr wrap="square" lIns="0" tIns="0" rIns="0" bIns="0" rtlCol="0" anchor="t"/>
-          <a:lstStyle/>
-          <a:p>
-            <a:pPr algn="l" indent="0" marL="0">
-              <a:spcAft>
-                <a:spcPts val="800"/>
-              </a:spcAft>
-              <a:buNone/>
-            </a:pPr>
-            <a:r>
-              <a:rPr lang="en-US" sz="4000" dirty="0">
-                <a:solidFill>
-                  <a:srgbClr val="111111"/>
-                </a:solidFill>
-                <a:latin typeface="Times New Roman" pitchFamily="34" charset="0"/>
-                <a:ea typeface="Times New Roman" pitchFamily="34" charset="-122"/>
-                <a:cs typeface="Times New Roman" pitchFamily="34" charset="-120"/>
-              </a:rPr>
-              <a:t>Answers vary. Many elders say the dry season today is hotter and longer, and the rains are less regular than when they were young.</a:t>
-            </a:r>
-            <a:endParaRPr lang="en-US" sz="4000" dirty="0"/>
-          </a:p>
-        </p:txBody>
-      </p:sp>
-      <p:sp>
-        <p:nvSpPr>
-          <p:cNvPr id="25" name="Slide Number Placeholder 0"/>
-          <p:cNvSpPr>
-            <a:spLocks noGrp="1"/>
-          </p:cNvSpPr>
-          <p:nvPr>
-            <p:ph type="sldNum" sz="quarter" idx="4294967295"/>
-          </p:nvPr>
-        </p:nvSpPr>
-        <p:spPr>
-          <a:xfrm>
-            <a:off x="27432" y="91440"/>
-            <a:ext cx="585216" cy="475488"/>
-          </a:xfrm>
-          <a:prstGeom prst="rect">
-            <a:avLst/>
-          </a:prstGeom>
-          <a:extLst>
-            <a:ext uri="{C572A759-6A51-4108-AA02-DFA0A04FC94B}">
-              <ma14:wrappingTextBoxFlag xmlns:ma14="http://schemas.microsoft.com/office/mac/drawingml/2011/main" val="0"/>
-            </a:ext>
-          </a:extLst>
-        </p:spPr>
-        <p:txBody>
-          <a:bodyPr/>
-          <a:lstStyle>
-            <a:lvl1pPr>
-              <a:defRPr sz="2000">
-                <a:solidFill>
-                  <a:srgbClr val="FFFFFF"/>
-                </a:solidFill>
-                <a:latin typeface="Calibri"/>
-                <a:ea typeface="Calibri"/>
-                <a:cs typeface="Calibri"/>
-              </a:defRPr>
-            </a:lvl1pPr>
-          </a:lstStyle>
-          <a:p>
-            <a:pPr algn="ctr"/>
-            <a:fld id="{F7021451-1387-4CA6-816F-3879F97B5CBC}" type="slidenum">
-              <a:rPr b="1" lang="en-US"/>
-              <a:t>5</a:t>
+              <a:t>52</a:t>
             </a:fld>
             <a:endParaRPr lang="en-US"/>
           </a:p>

--- a/lecons/F3/44_FORM4_LESSON40_Global_Warming.pptx
+++ b/lecons/F3/44_FORM4_LESSON40_Global_Warming.pptx
@@ -3457,7 +3457,7 @@
           <a:p>
             <a:r>
               <a:rPr lang="en-US" dirty="0"/>
-              <a:t>Before we start the new lesson, let us correct the homework I gave you at the end of Lesson 39: The Hydrological Cycle. The question was: Ask your grandparents or an elder whether the dry season is hotter or longer today than when they were young. Write down what they say. Take out your exercise books.</a:t>
+              <a:t>Before we start the new lesson, let us correct the homework I gave you at the end of Lesson 39: The Hydrological Cycle. The question was: Name two greenhouse gases. Take out your exercise books.</a:t>
             </a:r>
             <a:endParaRPr lang="en-US" dirty="0"/>
           </a:p>
@@ -4073,7 +4073,7 @@
           <a:p>
             <a:r>
               <a:rPr lang="en-US" dirty="0"/>
-              <a:t>For your homework: Ask an adult in your family whether your area has ever been flooded or has suffered a very dry year. Write down when it happened and what damage it caused. We shall correct it at the beginning of our next lesson.</a:t>
+              <a:t>For your homework: Define desertification. We shall correct it at the beginning of our next lesson.</a:t>
             </a:r>
             <a:endParaRPr lang="en-US" dirty="0"/>
           </a:p>
@@ -4425,7 +4425,7 @@
           <a:p>
             <a:r>
               <a:rPr lang="en-US" dirty="0"/>
-              <a:t>Here is a good answer. Answers vary. Many elders say the dry season today is hotter and longer, and the rains are less regular than when they were young. Compare it with your own answer and correct your work in red.</a:t>
+              <a:t>Here is a good answer. Carbon dioxide and methane. Compare it with your own answer and correct your work in red.</a:t>
             </a:r>
             <a:endParaRPr lang="en-US" dirty="0"/>
           </a:p>
@@ -15586,7 +15586,7 @@
                 <a:ea typeface="Times New Roman" pitchFamily="34" charset="-122"/>
                 <a:cs typeface="Times New Roman" pitchFamily="34" charset="-120"/>
               </a:rPr>
-              <a:t>Ask your grandparents or an elder whether the dry season is hotter or longer today than when they were young. Write down what they say.</a:t>
+              <a:t>Name two greenhouse gases.</a:t>
             </a:r>
             <a:endParaRPr lang="en-US" sz="4000" dirty="0"/>
           </a:p>
@@ -17239,7 +17239,7 @@
                 <a:ea typeface="Times New Roman" pitchFamily="34" charset="-122"/>
                 <a:cs typeface="Times New Roman" pitchFamily="34" charset="-120"/>
               </a:rPr>
-              <a:t>Ask an adult in your family whether your area has ever been flooded or has suffered a very dry year. Write down when it happened and what damage it caused.</a:t>
+              <a:t>Define desertification.</a:t>
             </a:r>
             <a:endParaRPr lang="en-US" sz="4000" dirty="0"/>
           </a:p>
@@ -19853,7 +19853,7 @@
                 <a:ea typeface="Times New Roman" pitchFamily="34" charset="-122"/>
                 <a:cs typeface="Times New Roman" pitchFamily="34" charset="-120"/>
               </a:rPr>
-              <a:t>Answers vary. Many elders say the dry season today is hotter and longer, and the rains are less regular than when they were young.</a:t>
+              <a:t>Carbon dioxide and methane.</a:t>
             </a:r>
             <a:endParaRPr lang="en-US" sz="4000" dirty="0"/>
           </a:p>
@@ -20398,7 +20398,7 @@
                           <a:ea typeface="Calibri" pitchFamily="34" charset="-122"/>
                           <a:cs typeface="Calibri" pitchFamily="34" charset="-120"/>
                         </a:rPr>
-                        <a:t>Ask an adult in your family whether your area has ever been flooded or has suffered a very dry year. Write down when it happened and what damage it caused.</a:t>
+                        <a:t>Define desertification.</a:t>
                       </a:r>
                       <a:endParaRPr lang="en-US" sz="1600" dirty="0">
                         <a:latin typeface="Calibri" charset="0"/>
